--- a/gyeongsan/GSJOB_3교시_이력서.pptx
+++ b/gyeongsan/GSJOB_3교시_이력서.pptx
@@ -3123,7 +3123,7 @@
             <a:avLst/>
           </a:prstGeom>
           <a:solidFill>
-            <a:srgbClr val="F1F4FC"/>
+            <a:srgbClr val="F1F7F5"/>
           </a:solidFill>
           <a:ln>
             <a:noFill/>
@@ -3183,7 +3183,7 @@
             <a:avLst/>
           </a:prstGeom>
           <a:solidFill>
-            <a:srgbClr val="F6F6F9"/>
+            <a:srgbClr val="F6F7F9"/>
           </a:solidFill>
           <a:ln>
             <a:noFill/>
@@ -3213,7 +3213,7 @@
             <a:avLst/>
           </a:prstGeom>
           <a:solidFill>
-            <a:srgbClr val="E8E9F0"/>
+            <a:srgbClr val="E8EBF0"/>
           </a:solidFill>
           <a:ln>
             <a:noFill/>
@@ -3243,7 +3243,7 @@
             <a:avLst/>
           </a:prstGeom>
           <a:solidFill>
-            <a:srgbClr val="EEF2FB"/>
+            <a:srgbClr val="EEF5F2"/>
           </a:solidFill>
           <a:ln>
             <a:noFill/>
@@ -3303,7 +3303,7 @@
             <a:avLst/>
           </a:prstGeom>
           <a:solidFill>
-            <a:srgbClr val="EDEDF3"/>
+            <a:srgbClr val="EDEFF3"/>
           </a:solidFill>
           <a:ln>
             <a:noFill/>
@@ -3333,7 +3333,7 @@
             <a:avLst/>
           </a:prstGeom>
           <a:solidFill>
-            <a:srgbClr val="E2E9F9"/>
+            <a:srgbClr val="E1EEE9"/>
           </a:solidFill>
           <a:ln>
             <a:noFill/>
@@ -3363,7 +3363,7 @@
             <a:avLst/>
           </a:prstGeom>
           <a:solidFill>
-            <a:srgbClr val="E8E9F0"/>
+            <a:srgbClr val="E8EBF0"/>
           </a:solidFill>
           <a:ln>
             <a:noFill/>
@@ -3393,7 +3393,7 @@
             <a:avLst/>
           </a:prstGeom>
           <a:solidFill>
-            <a:srgbClr val="1E2A6E"/>
+            <a:srgbClr val="1E3E69"/>
           </a:solidFill>
           <a:ln>
             <a:noFill/>
@@ -3438,7 +3438,7 @@
             <a:r>
               <a:rPr sz="2400" b="1" spc="120">
                 <a:solidFill>
-                  <a:srgbClr val="2457D6"/>
+                  <a:srgbClr val="1E7F5B"/>
                 </a:solidFill>
                 <a:latin typeface="Pretendard"/>
                 <a:ea typeface="Pretendard"/>
@@ -3479,7 +3479,7 @@
             <a:r>
               <a:rPr sz="6300" b="1" spc="-235">
                 <a:solidFill>
-                  <a:srgbClr val="1E2A6E"/>
+                  <a:srgbClr val="1E3E69"/>
                 </a:solidFill>
                 <a:latin typeface="Pretendard"/>
                 <a:ea typeface="Pretendard"/>
@@ -3497,7 +3497,7 @@
             <a:r>
               <a:rPr sz="6300" b="1" spc="-235">
                 <a:solidFill>
-                  <a:srgbClr val="1E2A6E"/>
+                  <a:srgbClr val="1E3E69"/>
                 </a:solidFill>
                 <a:latin typeface="Pretendard"/>
                 <a:ea typeface="Pretendard"/>
@@ -3641,7 +3641,7 @@
             <a:avLst/>
           </a:prstGeom>
           <a:solidFill>
-            <a:srgbClr val="F4F6FC"/>
+            <a:srgbClr val="F3F8F6"/>
           </a:solidFill>
           <a:ln>
             <a:noFill/>
@@ -3671,7 +3671,7 @@
             <a:avLst/>
           </a:prstGeom>
           <a:solidFill>
-            <a:srgbClr val="F6F6F9"/>
+            <a:srgbClr val="F6F7F9"/>
           </a:solidFill>
           <a:ln>
             <a:noFill/>
@@ -3701,7 +3701,7 @@
             <a:avLst/>
           </a:prstGeom>
           <a:solidFill>
-            <a:srgbClr val="1E2A6E"/>
+            <a:srgbClr val="1E3E69"/>
           </a:solidFill>
           <a:ln>
             <a:noFill/>
@@ -3746,7 +3746,7 @@
             <a:r>
               <a:rPr sz="2400" b="1">
                 <a:solidFill>
-                  <a:srgbClr val="2457D6"/>
+                  <a:srgbClr val="1E7F5B"/>
                 </a:solidFill>
                 <a:latin typeface="Pretendard"/>
                 <a:ea typeface="Pretendard"/>
@@ -3787,7 +3787,7 @@
             <a:r>
               <a:rPr sz="6600" b="1">
                 <a:solidFill>
-                  <a:srgbClr val="1E2A6E"/>
+                  <a:srgbClr val="1E3E69"/>
                 </a:solidFill>
                 <a:latin typeface="Pretendard"/>
                 <a:ea typeface="Pretendard"/>
@@ -3854,7 +3854,7 @@
             <a:avLst/>
           </a:prstGeom>
           <a:solidFill>
-            <a:srgbClr val="DEE3F0"/>
+            <a:srgbClr val="D8E1EE"/>
           </a:solidFill>
           <a:ln>
             <a:noFill/>
@@ -3984,7 +3984,7 @@
             <a:avLst/>
           </a:prstGeom>
           <a:solidFill>
-            <a:srgbClr val="F4F6FC"/>
+            <a:srgbClr val="F3F8F6"/>
           </a:solidFill>
           <a:ln>
             <a:noFill/>
@@ -4044,7 +4044,7 @@
             <a:avLst/>
           </a:prstGeom>
           <a:solidFill>
-            <a:srgbClr val="F8F8FA"/>
+            <a:srgbClr val="F8F9FA"/>
           </a:solidFill>
           <a:ln>
             <a:noFill/>
@@ -4089,7 +4089,7 @@
             <a:r>
               <a:rPr sz="1950" b="1" spc="160">
                 <a:solidFill>
-                  <a:srgbClr val="2457D6"/>
+                  <a:srgbClr val="1E7F5B"/>
                 </a:solidFill>
                 <a:latin typeface="Pretendard"/>
                 <a:ea typeface="Pretendard"/>
@@ -4130,7 +4130,7 @@
             <a:r>
               <a:rPr sz="5100" b="1">
                 <a:solidFill>
-                  <a:srgbClr val="1E2A6E"/>
+                  <a:srgbClr val="1E3E69"/>
                 </a:solidFill>
                 <a:latin typeface="Pretendard"/>
                 <a:ea typeface="Pretendard"/>
@@ -4156,7 +4156,7 @@
             <a:avLst/>
           </a:prstGeom>
           <a:solidFill>
-            <a:srgbClr val="1E2A6E"/>
+            <a:srgbClr val="1E3E69"/>
           </a:solidFill>
           <a:ln>
             <a:noFill/>
@@ -4201,7 +4201,7 @@
             <a:r>
               <a:rPr sz="3150" b="1">
                 <a:solidFill>
-                  <a:srgbClr val="1E2A6E"/>
+                  <a:srgbClr val="1E3E69"/>
                 </a:solidFill>
                 <a:latin typeface="Pretendard"/>
                 <a:ea typeface="Pretendard"/>
@@ -4270,11 +4270,11 @@
             </a:avLst>
           </a:prstGeom>
           <a:solidFill>
-            <a:srgbClr val="F6F8FD"/>
+            <a:srgbClr val="F4F7FA"/>
           </a:solidFill>
           <a:ln w="9525">
             <a:solidFill>
-              <a:srgbClr val="DEE3F0"/>
+              <a:srgbClr val="D8E1EE"/>
             </a:solidFill>
           </a:ln>
           <a:effectLst/>
@@ -4302,7 +4302,7 @@
             <a:avLst/>
           </a:prstGeom>
           <a:solidFill>
-            <a:srgbClr val="2457D6"/>
+            <a:srgbClr val="1E7F5B"/>
           </a:solidFill>
           <a:ln>
             <a:noFill/>
@@ -4373,7 +4373,7 @@
             <a:avLst/>
           </a:prstGeom>
           <a:solidFill>
-            <a:srgbClr val="2457D6"/>
+            <a:srgbClr val="1E7F5B"/>
           </a:solidFill>
           <a:ln>
             <a:noFill/>
@@ -4444,7 +4444,7 @@
             <a:avLst/>
           </a:prstGeom>
           <a:solidFill>
-            <a:srgbClr val="2457D6"/>
+            <a:srgbClr val="1E7F5B"/>
           </a:solidFill>
           <a:ln>
             <a:noFill/>
@@ -4530,7 +4530,7 @@
             <a:r>
               <a:rPr sz="3150" b="1">
                 <a:solidFill>
-                  <a:srgbClr val="1E2A6E"/>
+                  <a:srgbClr val="1E3E69"/>
                 </a:solidFill>
                 <a:latin typeface="Pretendard"/>
                 <a:ea typeface="Pretendard"/>
@@ -4599,11 +4599,11 @@
             </a:avLst>
           </a:prstGeom>
           <a:solidFill>
-            <a:srgbClr val="F6F8FD"/>
+            <a:srgbClr val="F4F7FA"/>
           </a:solidFill>
           <a:ln w="9525">
             <a:solidFill>
-              <a:srgbClr val="DEE3F0"/>
+              <a:srgbClr val="D8E1EE"/>
             </a:solidFill>
           </a:ln>
           <a:effectLst/>
@@ -4631,7 +4631,7 @@
             <a:avLst/>
           </a:prstGeom>
           <a:solidFill>
-            <a:srgbClr val="2457D6"/>
+            <a:srgbClr val="1E7F5B"/>
           </a:solidFill>
           <a:ln>
             <a:noFill/>
@@ -4702,7 +4702,7 @@
             <a:avLst/>
           </a:prstGeom>
           <a:solidFill>
-            <a:srgbClr val="2457D6"/>
+            <a:srgbClr val="1E7F5B"/>
           </a:solidFill>
           <a:ln>
             <a:noFill/>
@@ -4773,7 +4773,7 @@
             <a:avLst/>
           </a:prstGeom>
           <a:solidFill>
-            <a:srgbClr val="2457D6"/>
+            <a:srgbClr val="1E7F5B"/>
           </a:solidFill>
           <a:ln>
             <a:noFill/>
@@ -4844,7 +4844,7 @@
             <a:avLst/>
           </a:prstGeom>
           <a:solidFill>
-            <a:srgbClr val="1E2A6E"/>
+            <a:srgbClr val="1E3E69"/>
           </a:solidFill>
           <a:ln>
             <a:noFill/>
@@ -4915,7 +4915,7 @@
             <a:avLst/>
           </a:prstGeom>
           <a:solidFill>
-            <a:srgbClr val="DEE3F0"/>
+            <a:srgbClr val="D8E1EE"/>
           </a:solidFill>
           <a:ln>
             <a:noFill/>
@@ -5045,7 +5045,7 @@
             <a:avLst/>
           </a:prstGeom>
           <a:solidFill>
-            <a:srgbClr val="F4F6FC"/>
+            <a:srgbClr val="F3F8F6"/>
           </a:solidFill>
           <a:ln>
             <a:noFill/>
@@ -5105,7 +5105,7 @@
             <a:avLst/>
           </a:prstGeom>
           <a:solidFill>
-            <a:srgbClr val="F8F8FA"/>
+            <a:srgbClr val="F8F9FA"/>
           </a:solidFill>
           <a:ln>
             <a:noFill/>
@@ -5150,7 +5150,7 @@
             <a:r>
               <a:rPr sz="1950" b="1" spc="160">
                 <a:solidFill>
-                  <a:srgbClr val="2457D6"/>
+                  <a:srgbClr val="1E7F5B"/>
                 </a:solidFill>
                 <a:latin typeface="Pretendard"/>
                 <a:ea typeface="Pretendard"/>
@@ -5191,7 +5191,7 @@
             <a:r>
               <a:rPr sz="5100" b="1">
                 <a:solidFill>
-                  <a:srgbClr val="1E2A6E"/>
+                  <a:srgbClr val="1E3E69"/>
                 </a:solidFill>
                 <a:latin typeface="Pretendard"/>
                 <a:ea typeface="Pretendard"/>
@@ -5217,7 +5217,7 @@
             <a:avLst/>
           </a:prstGeom>
           <a:solidFill>
-            <a:srgbClr val="1E2A6E"/>
+            <a:srgbClr val="1E3E69"/>
           </a:solidFill>
           <a:ln>
             <a:noFill/>
@@ -5247,7 +5247,7 @@
             <a:avLst/>
           </a:prstGeom>
           <a:solidFill>
-            <a:srgbClr val="1E2A6E"/>
+            <a:srgbClr val="1E3E69"/>
           </a:solidFill>
           <a:ln>
             <a:noFill/>
@@ -5318,7 +5318,7 @@
             <a:avLst/>
           </a:prstGeom>
           <a:solidFill>
-            <a:srgbClr val="2457D6"/>
+            <a:srgbClr val="1E7F5B"/>
           </a:solidFill>
           <a:ln>
             <a:noFill/>
@@ -5391,11 +5391,11 @@
             </a:avLst>
           </a:prstGeom>
           <a:solidFill>
-            <a:srgbClr val="EAF0FF"/>
+            <a:srgbClr val="E6F4EE"/>
           </a:solidFill>
           <a:ln w="9525">
             <a:solidFill>
-              <a:srgbClr val="C9D7FF"/>
+              <a:srgbClr val="C3E6D8"/>
             </a:solidFill>
           </a:ln>
           <a:effectLst/>
@@ -5438,7 +5438,7 @@
             <a:r>
               <a:rPr sz="1875" b="1">
                 <a:solidFill>
-                  <a:srgbClr val="1E2A6E"/>
+                  <a:srgbClr val="1E3E69"/>
                 </a:solidFill>
                 <a:latin typeface="Pretendard"/>
                 <a:ea typeface="Pretendard"/>
@@ -5466,11 +5466,11 @@
             </a:avLst>
           </a:prstGeom>
           <a:solidFill>
-            <a:srgbClr val="F6F8FD"/>
+            <a:srgbClr val="F4F7FA"/>
           </a:solidFill>
           <a:ln w="9525">
             <a:solidFill>
-              <a:srgbClr val="DEE3F0"/>
+              <a:srgbClr val="D8E1EE"/>
             </a:solidFill>
           </a:ln>
           <a:effectLst/>
@@ -5541,11 +5541,11 @@
             </a:avLst>
           </a:prstGeom>
           <a:solidFill>
-            <a:srgbClr val="EAF0FF"/>
+            <a:srgbClr val="E6F4EE"/>
           </a:solidFill>
           <a:ln w="9525">
             <a:solidFill>
-              <a:srgbClr val="C9D7FF"/>
+              <a:srgbClr val="C3E6D8"/>
             </a:solidFill>
           </a:ln>
           <a:effectLst/>
@@ -5588,7 +5588,7 @@
             <a:r>
               <a:rPr sz="1875" b="1">
                 <a:solidFill>
-                  <a:srgbClr val="1E2A6E"/>
+                  <a:srgbClr val="1E3E69"/>
                 </a:solidFill>
                 <a:latin typeface="Pretendard"/>
                 <a:ea typeface="Pretendard"/>
@@ -5616,11 +5616,11 @@
             </a:avLst>
           </a:prstGeom>
           <a:solidFill>
-            <a:srgbClr val="F6F8FD"/>
+            <a:srgbClr val="F4F7FA"/>
           </a:solidFill>
           <a:ln w="9525">
             <a:solidFill>
-              <a:srgbClr val="DEE3F0"/>
+              <a:srgbClr val="D8E1EE"/>
             </a:solidFill>
           </a:ln>
           <a:effectLst/>
@@ -5691,11 +5691,11 @@
             </a:avLst>
           </a:prstGeom>
           <a:solidFill>
-            <a:srgbClr val="EAF0FF"/>
+            <a:srgbClr val="E6F4EE"/>
           </a:solidFill>
           <a:ln w="9525">
             <a:solidFill>
-              <a:srgbClr val="C9D7FF"/>
+              <a:srgbClr val="C3E6D8"/>
             </a:solidFill>
           </a:ln>
           <a:effectLst/>
@@ -5738,7 +5738,7 @@
             <a:r>
               <a:rPr sz="1875" b="1">
                 <a:solidFill>
-                  <a:srgbClr val="1E2A6E"/>
+                  <a:srgbClr val="1E3E69"/>
                 </a:solidFill>
                 <a:latin typeface="Pretendard"/>
                 <a:ea typeface="Pretendard"/>
@@ -5766,11 +5766,11 @@
             </a:avLst>
           </a:prstGeom>
           <a:solidFill>
-            <a:srgbClr val="F6F8FD"/>
+            <a:srgbClr val="F4F7FA"/>
           </a:solidFill>
           <a:ln w="9525">
             <a:solidFill>
-              <a:srgbClr val="DEE3F0"/>
+              <a:srgbClr val="D8E1EE"/>
             </a:solidFill>
           </a:ln>
           <a:effectLst/>
@@ -5841,11 +5841,11 @@
             </a:avLst>
           </a:prstGeom>
           <a:solidFill>
-            <a:srgbClr val="EAF0FF"/>
+            <a:srgbClr val="E6F4EE"/>
           </a:solidFill>
           <a:ln w="9525">
             <a:solidFill>
-              <a:srgbClr val="C9D7FF"/>
+              <a:srgbClr val="C3E6D8"/>
             </a:solidFill>
           </a:ln>
           <a:effectLst/>
@@ -5888,7 +5888,7 @@
             <a:r>
               <a:rPr sz="1875" b="1">
                 <a:solidFill>
-                  <a:srgbClr val="1E2A6E"/>
+                  <a:srgbClr val="1E3E69"/>
                 </a:solidFill>
                 <a:latin typeface="Pretendard"/>
                 <a:ea typeface="Pretendard"/>
@@ -5916,11 +5916,11 @@
             </a:avLst>
           </a:prstGeom>
           <a:solidFill>
-            <a:srgbClr val="F6F8FD"/>
+            <a:srgbClr val="F4F7FA"/>
           </a:solidFill>
           <a:ln w="9525">
             <a:solidFill>
-              <a:srgbClr val="DEE3F0"/>
+              <a:srgbClr val="D8E1EE"/>
             </a:solidFill>
           </a:ln>
           <a:effectLst/>
@@ -5991,11 +5991,11 @@
             </a:avLst>
           </a:prstGeom>
           <a:solidFill>
-            <a:srgbClr val="EAF0FF"/>
+            <a:srgbClr val="E6F4EE"/>
           </a:solidFill>
           <a:ln w="9525">
             <a:solidFill>
-              <a:srgbClr val="C9D7FF"/>
+              <a:srgbClr val="C3E6D8"/>
             </a:solidFill>
           </a:ln>
           <a:effectLst/>
@@ -6038,7 +6038,7 @@
             <a:r>
               <a:rPr sz="1875" b="1">
                 <a:solidFill>
-                  <a:srgbClr val="1E2A6E"/>
+                  <a:srgbClr val="1E3E69"/>
                 </a:solidFill>
                 <a:latin typeface="Pretendard"/>
                 <a:ea typeface="Pretendard"/>
@@ -6066,11 +6066,11 @@
             </a:avLst>
           </a:prstGeom>
           <a:solidFill>
-            <a:srgbClr val="F6F8FD"/>
+            <a:srgbClr val="F4F7FA"/>
           </a:solidFill>
           <a:ln w="9525">
             <a:solidFill>
-              <a:srgbClr val="DEE3F0"/>
+              <a:srgbClr val="D8E1EE"/>
             </a:solidFill>
           </a:ln>
           <a:effectLst/>
@@ -6180,7 +6180,7 @@
             <a:avLst/>
           </a:prstGeom>
           <a:solidFill>
-            <a:srgbClr val="DEE3F0"/>
+            <a:srgbClr val="D8E1EE"/>
           </a:solidFill>
           <a:ln>
             <a:noFill/>
@@ -6310,7 +6310,7 @@
             <a:avLst/>
           </a:prstGeom>
           <a:solidFill>
-            <a:srgbClr val="F4F6FC"/>
+            <a:srgbClr val="F3F8F6"/>
           </a:solidFill>
           <a:ln>
             <a:noFill/>
@@ -6370,7 +6370,7 @@
             <a:avLst/>
           </a:prstGeom>
           <a:solidFill>
-            <a:srgbClr val="F8F8FA"/>
+            <a:srgbClr val="F8F9FA"/>
           </a:solidFill>
           <a:ln>
             <a:noFill/>
@@ -6402,7 +6402,7 @@
             </a:avLst>
           </a:prstGeom>
           <a:solidFill>
-            <a:srgbClr val="2457D6"/>
+            <a:srgbClr val="1E7F5B"/>
           </a:solidFill>
           <a:ln>
             <a:noFill/>
@@ -6518,7 +6518,7 @@
             <a:r>
               <a:rPr sz="1950" b="1" spc="160">
                 <a:solidFill>
-                  <a:srgbClr val="2457D6"/>
+                  <a:srgbClr val="1E7F5B"/>
                 </a:solidFill>
                 <a:latin typeface="Pretendard"/>
                 <a:ea typeface="Pretendard"/>
@@ -6559,7 +6559,7 @@
             <a:r>
               <a:rPr sz="5100" b="1">
                 <a:solidFill>
-                  <a:srgbClr val="1E2A6E"/>
+                  <a:srgbClr val="1E3E69"/>
                 </a:solidFill>
                 <a:latin typeface="Pretendard"/>
                 <a:ea typeface="Pretendard"/>
@@ -6585,7 +6585,7 @@
             <a:avLst/>
           </a:prstGeom>
           <a:solidFill>
-            <a:srgbClr val="1E2A6E"/>
+            <a:srgbClr val="1E3E69"/>
           </a:solidFill>
           <a:ln>
             <a:noFill/>
@@ -6630,7 +6630,7 @@
             <a:r>
               <a:rPr sz="2250" b="1">
                 <a:solidFill>
-                  <a:srgbClr val="2457D6"/>
+                  <a:srgbClr val="1E7F5B"/>
                 </a:solidFill>
                 <a:latin typeface="Pretendard"/>
                 <a:ea typeface="Pretendard"/>
@@ -6658,11 +6658,11 @@
             </a:avLst>
           </a:prstGeom>
           <a:solidFill>
-            <a:srgbClr val="F6F8FD"/>
+            <a:srgbClr val="F4F7FA"/>
           </a:solidFill>
           <a:ln w="9525">
             <a:solidFill>
-              <a:srgbClr val="DEE3F0"/>
+              <a:srgbClr val="D8E1EE"/>
             </a:solidFill>
           </a:ln>
           <a:effectLst/>
@@ -6690,7 +6690,7 @@
             <a:avLst/>
           </a:prstGeom>
           <a:solidFill>
-            <a:srgbClr val="1E2A6E"/>
+            <a:srgbClr val="1E3E69"/>
           </a:solidFill>
           <a:ln>
             <a:noFill/>
@@ -6776,7 +6776,7 @@
             <a:r>
               <a:rPr sz="2700" b="1">
                 <a:solidFill>
-                  <a:srgbClr val="1E2A6E"/>
+                  <a:srgbClr val="1E3E69"/>
                 </a:solidFill>
                 <a:latin typeface="Pretendard"/>
                 <a:ea typeface="Pretendard"/>
@@ -6802,7 +6802,7 @@
             <a:avLst/>
           </a:prstGeom>
           <a:solidFill>
-            <a:srgbClr val="2457D6"/>
+            <a:srgbClr val="1E7F5B"/>
           </a:solidFill>
           <a:ln>
             <a:noFill/>
@@ -6847,7 +6847,7 @@
             <a:r>
               <a:rPr sz="1875" b="1" spc="150">
                 <a:solidFill>
-                  <a:srgbClr val="2457D6"/>
+                  <a:srgbClr val="1E7F5B"/>
                 </a:solidFill>
                 <a:latin typeface="Pretendard"/>
                 <a:ea typeface="Pretendard"/>
@@ -6888,7 +6888,7 @@
             <a:r>
               <a:rPr sz="2475" b="1">
                 <a:solidFill>
-                  <a:srgbClr val="1E2A6E"/>
+                  <a:srgbClr val="1E3E69"/>
                 </a:solidFill>
                 <a:latin typeface="Pretendard"/>
                 <a:ea typeface="Pretendard"/>
@@ -6914,7 +6914,7 @@
             <a:avLst/>
           </a:prstGeom>
           <a:solidFill>
-            <a:srgbClr val="DEE3F0"/>
+            <a:srgbClr val="D8E1EE"/>
           </a:solidFill>
           <a:ln>
             <a:noFill/>
@@ -7044,7 +7044,7 @@
             <a:avLst/>
           </a:prstGeom>
           <a:solidFill>
-            <a:srgbClr val="F4F6FC"/>
+            <a:srgbClr val="F3F8F6"/>
           </a:solidFill>
           <a:ln>
             <a:noFill/>
@@ -7074,7 +7074,7 @@
             <a:avLst/>
           </a:prstGeom>
           <a:solidFill>
-            <a:srgbClr val="F6F6F9"/>
+            <a:srgbClr val="F6F7F9"/>
           </a:solidFill>
           <a:ln>
             <a:noFill/>
@@ -7104,7 +7104,7 @@
             <a:avLst/>
           </a:prstGeom>
           <a:solidFill>
-            <a:srgbClr val="1E2A6E"/>
+            <a:srgbClr val="1E3E69"/>
           </a:solidFill>
           <a:ln>
             <a:noFill/>
@@ -7149,7 +7149,7 @@
             <a:r>
               <a:rPr sz="2400" b="1">
                 <a:solidFill>
-                  <a:srgbClr val="2457D6"/>
+                  <a:srgbClr val="1E7F5B"/>
                 </a:solidFill>
                 <a:latin typeface="Pretendard"/>
                 <a:ea typeface="Pretendard"/>
@@ -7190,7 +7190,7 @@
             <a:r>
               <a:rPr sz="6600" b="1">
                 <a:solidFill>
-                  <a:srgbClr val="1E2A6E"/>
+                  <a:srgbClr val="1E3E69"/>
                 </a:solidFill>
                 <a:latin typeface="Pretendard"/>
                 <a:ea typeface="Pretendard"/>
@@ -7257,7 +7257,7 @@
             <a:avLst/>
           </a:prstGeom>
           <a:solidFill>
-            <a:srgbClr val="DEE3F0"/>
+            <a:srgbClr val="D8E1EE"/>
           </a:solidFill>
           <a:ln>
             <a:noFill/>
@@ -7387,7 +7387,7 @@
             <a:avLst/>
           </a:prstGeom>
           <a:solidFill>
-            <a:srgbClr val="F4F6FC"/>
+            <a:srgbClr val="F3F8F6"/>
           </a:solidFill>
           <a:ln>
             <a:noFill/>
@@ -7447,7 +7447,7 @@
             <a:avLst/>
           </a:prstGeom>
           <a:solidFill>
-            <a:srgbClr val="F8F8FA"/>
+            <a:srgbClr val="F8F9FA"/>
           </a:solidFill>
           <a:ln>
             <a:noFill/>
@@ -7479,7 +7479,7 @@
             </a:avLst>
           </a:prstGeom>
           <a:solidFill>
-            <a:srgbClr val="2457D6"/>
+            <a:srgbClr val="1E7F5B"/>
           </a:solidFill>
           <a:ln>
             <a:noFill/>
@@ -7595,7 +7595,7 @@
             <a:r>
               <a:rPr sz="1950" b="1" spc="160">
                 <a:solidFill>
-                  <a:srgbClr val="2457D6"/>
+                  <a:srgbClr val="1E7F5B"/>
                 </a:solidFill>
                 <a:latin typeface="Pretendard"/>
                 <a:ea typeface="Pretendard"/>
@@ -7636,7 +7636,7 @@
             <a:r>
               <a:rPr sz="5100" b="1">
                 <a:solidFill>
-                  <a:srgbClr val="1E2A6E"/>
+                  <a:srgbClr val="1E3E69"/>
                 </a:solidFill>
                 <a:latin typeface="Pretendard"/>
                 <a:ea typeface="Pretendard"/>
@@ -7662,7 +7662,7 @@
             <a:avLst/>
           </a:prstGeom>
           <a:solidFill>
-            <a:srgbClr val="1E2A6E"/>
+            <a:srgbClr val="1E3E69"/>
           </a:solidFill>
           <a:ln>
             <a:noFill/>
@@ -7707,7 +7707,7 @@
             <a:r>
               <a:rPr sz="2250" b="1">
                 <a:solidFill>
-                  <a:srgbClr val="2457D6"/>
+                  <a:srgbClr val="1E7F5B"/>
                 </a:solidFill>
                 <a:latin typeface="Pretendard"/>
                 <a:ea typeface="Pretendard"/>
@@ -7735,11 +7735,11 @@
             </a:avLst>
           </a:prstGeom>
           <a:solidFill>
-            <a:srgbClr val="F6F8FD"/>
+            <a:srgbClr val="F4F7FA"/>
           </a:solidFill>
           <a:ln w="9525">
             <a:solidFill>
-              <a:srgbClr val="DEE3F0"/>
+              <a:srgbClr val="D8E1EE"/>
             </a:solidFill>
           </a:ln>
           <a:effectLst/>
@@ -7767,7 +7767,7 @@
             <a:avLst/>
           </a:prstGeom>
           <a:solidFill>
-            <a:srgbClr val="1E2A6E"/>
+            <a:srgbClr val="1E3E69"/>
           </a:solidFill>
           <a:ln>
             <a:noFill/>
@@ -7853,7 +7853,7 @@
             <a:r>
               <a:rPr sz="2700" b="1">
                 <a:solidFill>
-                  <a:srgbClr val="1E2A6E"/>
+                  <a:srgbClr val="1E3E69"/>
                 </a:solidFill>
                 <a:latin typeface="Pretendard"/>
                 <a:ea typeface="Pretendard"/>
@@ -7879,7 +7879,7 @@
             <a:avLst/>
           </a:prstGeom>
           <a:solidFill>
-            <a:srgbClr val="2457D6"/>
+            <a:srgbClr val="1E7F5B"/>
           </a:solidFill>
           <a:ln>
             <a:noFill/>
@@ -7924,7 +7924,7 @@
             <a:r>
               <a:rPr sz="1875" b="1" spc="150">
                 <a:solidFill>
-                  <a:srgbClr val="2457D6"/>
+                  <a:srgbClr val="1E7F5B"/>
                 </a:solidFill>
                 <a:latin typeface="Pretendard"/>
                 <a:ea typeface="Pretendard"/>
@@ -7965,7 +7965,7 @@
             <a:r>
               <a:rPr sz="2475" b="1">
                 <a:solidFill>
-                  <a:srgbClr val="1E2A6E"/>
+                  <a:srgbClr val="1E3E69"/>
                 </a:solidFill>
                 <a:latin typeface="Pretendard"/>
                 <a:ea typeface="Pretendard"/>
@@ -7991,7 +7991,7 @@
             <a:avLst/>
           </a:prstGeom>
           <a:solidFill>
-            <a:srgbClr val="DEE3F0"/>
+            <a:srgbClr val="D8E1EE"/>
           </a:solidFill>
           <a:ln>
             <a:noFill/>
@@ -8121,7 +8121,7 @@
             <a:avLst/>
           </a:prstGeom>
           <a:solidFill>
-            <a:srgbClr val="F4F6FC"/>
+            <a:srgbClr val="F3F8F6"/>
           </a:solidFill>
           <a:ln>
             <a:noFill/>
@@ -8181,7 +8181,7 @@
             <a:avLst/>
           </a:prstGeom>
           <a:solidFill>
-            <a:srgbClr val="F8F8FA"/>
+            <a:srgbClr val="F8F9FA"/>
           </a:solidFill>
           <a:ln>
             <a:noFill/>
@@ -8226,7 +8226,7 @@
             <a:r>
               <a:rPr sz="1950" b="1" spc="160">
                 <a:solidFill>
-                  <a:srgbClr val="2457D6"/>
+                  <a:srgbClr val="1E7F5B"/>
                 </a:solidFill>
                 <a:latin typeface="Pretendard"/>
                 <a:ea typeface="Pretendard"/>
@@ -8267,7 +8267,7 @@
             <a:r>
               <a:rPr sz="5100" b="1">
                 <a:solidFill>
-                  <a:srgbClr val="1E2A6E"/>
+                  <a:srgbClr val="1E3E69"/>
                 </a:solidFill>
                 <a:latin typeface="Pretendard"/>
                 <a:ea typeface="Pretendard"/>
@@ -8293,7 +8293,7 @@
             <a:avLst/>
           </a:prstGeom>
           <a:solidFill>
-            <a:srgbClr val="1E2A6E"/>
+            <a:srgbClr val="1E3E69"/>
           </a:solidFill>
           <a:ln>
             <a:noFill/>
@@ -8323,7 +8323,7 @@
             <a:avLst/>
           </a:prstGeom>
           <a:solidFill>
-            <a:srgbClr val="1E2A6E"/>
+            <a:srgbClr val="1E3E69"/>
           </a:solidFill>
           <a:ln>
             <a:noFill/>
@@ -8394,7 +8394,7 @@
             <a:avLst/>
           </a:prstGeom>
           <a:solidFill>
-            <a:srgbClr val="2457D6"/>
+            <a:srgbClr val="1E7F5B"/>
           </a:solidFill>
           <a:ln>
             <a:noFill/>
@@ -8465,7 +8465,7 @@
             <a:avLst/>
           </a:prstGeom>
           <a:solidFill>
-            <a:srgbClr val="2457D6"/>
+            <a:srgbClr val="1E7F5B"/>
           </a:solidFill>
           <a:ln>
             <a:noFill/>
@@ -8538,11 +8538,11 @@
             </a:avLst>
           </a:prstGeom>
           <a:solidFill>
-            <a:srgbClr val="EAF0FF"/>
+            <a:srgbClr val="E6F4EE"/>
           </a:solidFill>
           <a:ln w="9525">
             <a:solidFill>
-              <a:srgbClr val="C9D7FF"/>
+              <a:srgbClr val="C3E6D8"/>
             </a:solidFill>
           </a:ln>
           <a:effectLst/>
@@ -8585,7 +8585,7 @@
             <a:r>
               <a:rPr sz="1875" b="1">
                 <a:solidFill>
-                  <a:srgbClr val="1E2A6E"/>
+                  <a:srgbClr val="1E3E69"/>
                 </a:solidFill>
                 <a:latin typeface="Pretendard"/>
                 <a:ea typeface="Pretendard"/>
@@ -8613,11 +8613,11 @@
             </a:avLst>
           </a:prstGeom>
           <a:solidFill>
-            <a:srgbClr val="F6F8FD"/>
+            <a:srgbClr val="F4F7FA"/>
           </a:solidFill>
           <a:ln w="9525">
             <a:solidFill>
-              <a:srgbClr val="DEE3F0"/>
+              <a:srgbClr val="D8E1EE"/>
             </a:solidFill>
           </a:ln>
           <a:effectLst/>
@@ -8688,11 +8688,11 @@
             </a:avLst>
           </a:prstGeom>
           <a:solidFill>
-            <a:srgbClr val="F6F8FD"/>
+            <a:srgbClr val="F4F7FA"/>
           </a:solidFill>
           <a:ln w="9525">
             <a:solidFill>
-              <a:srgbClr val="DEE3F0"/>
+              <a:srgbClr val="D8E1EE"/>
             </a:solidFill>
           </a:ln>
           <a:effectLst/>
@@ -8763,11 +8763,11 @@
             </a:avLst>
           </a:prstGeom>
           <a:solidFill>
-            <a:srgbClr val="EAF0FF"/>
+            <a:srgbClr val="E6F4EE"/>
           </a:solidFill>
           <a:ln w="9525">
             <a:solidFill>
-              <a:srgbClr val="C9D7FF"/>
+              <a:srgbClr val="C3E6D8"/>
             </a:solidFill>
           </a:ln>
           <a:effectLst/>
@@ -8810,7 +8810,7 @@
             <a:r>
               <a:rPr sz="1875" b="1">
                 <a:solidFill>
-                  <a:srgbClr val="1E2A6E"/>
+                  <a:srgbClr val="1E3E69"/>
                 </a:solidFill>
                 <a:latin typeface="Pretendard"/>
                 <a:ea typeface="Pretendard"/>
@@ -8838,11 +8838,11 @@
             </a:avLst>
           </a:prstGeom>
           <a:solidFill>
-            <a:srgbClr val="F6F8FD"/>
+            <a:srgbClr val="F4F7FA"/>
           </a:solidFill>
           <a:ln w="9525">
             <a:solidFill>
-              <a:srgbClr val="DEE3F0"/>
+              <a:srgbClr val="D8E1EE"/>
             </a:solidFill>
           </a:ln>
           <a:effectLst/>
@@ -8913,11 +8913,11 @@
             </a:avLst>
           </a:prstGeom>
           <a:solidFill>
-            <a:srgbClr val="F6F8FD"/>
+            <a:srgbClr val="F4F7FA"/>
           </a:solidFill>
           <a:ln w="9525">
             <a:solidFill>
-              <a:srgbClr val="DEE3F0"/>
+              <a:srgbClr val="D8E1EE"/>
             </a:solidFill>
           </a:ln>
           <a:effectLst/>
@@ -8988,11 +8988,11 @@
             </a:avLst>
           </a:prstGeom>
           <a:solidFill>
-            <a:srgbClr val="EAF0FF"/>
+            <a:srgbClr val="E6F4EE"/>
           </a:solidFill>
           <a:ln w="9525">
             <a:solidFill>
-              <a:srgbClr val="C9D7FF"/>
+              <a:srgbClr val="C3E6D8"/>
             </a:solidFill>
           </a:ln>
           <a:effectLst/>
@@ -9035,7 +9035,7 @@
             <a:r>
               <a:rPr sz="1875" b="1">
                 <a:solidFill>
-                  <a:srgbClr val="1E2A6E"/>
+                  <a:srgbClr val="1E3E69"/>
                 </a:solidFill>
                 <a:latin typeface="Pretendard"/>
                 <a:ea typeface="Pretendard"/>
@@ -9063,11 +9063,11 @@
             </a:avLst>
           </a:prstGeom>
           <a:solidFill>
-            <a:srgbClr val="F6F8FD"/>
+            <a:srgbClr val="F4F7FA"/>
           </a:solidFill>
           <a:ln w="9525">
             <a:solidFill>
-              <a:srgbClr val="DEE3F0"/>
+              <a:srgbClr val="D8E1EE"/>
             </a:solidFill>
           </a:ln>
           <a:effectLst/>
@@ -9138,11 +9138,11 @@
             </a:avLst>
           </a:prstGeom>
           <a:solidFill>
-            <a:srgbClr val="F6F8FD"/>
+            <a:srgbClr val="F4F7FA"/>
           </a:solidFill>
           <a:ln w="9525">
             <a:solidFill>
-              <a:srgbClr val="DEE3F0"/>
+              <a:srgbClr val="D8E1EE"/>
             </a:solidFill>
           </a:ln>
           <a:effectLst/>
@@ -9213,11 +9213,11 @@
             </a:avLst>
           </a:prstGeom>
           <a:solidFill>
-            <a:srgbClr val="EAF0FF"/>
+            <a:srgbClr val="E6F4EE"/>
           </a:solidFill>
           <a:ln w="9525">
             <a:solidFill>
-              <a:srgbClr val="C9D7FF"/>
+              <a:srgbClr val="C3E6D8"/>
             </a:solidFill>
           </a:ln>
           <a:effectLst/>
@@ -9260,7 +9260,7 @@
             <a:r>
               <a:rPr sz="1875" b="1">
                 <a:solidFill>
-                  <a:srgbClr val="1E2A6E"/>
+                  <a:srgbClr val="1E3E69"/>
                 </a:solidFill>
                 <a:latin typeface="Pretendard"/>
                 <a:ea typeface="Pretendard"/>
@@ -9288,11 +9288,11 @@
             </a:avLst>
           </a:prstGeom>
           <a:solidFill>
-            <a:srgbClr val="F6F8FD"/>
+            <a:srgbClr val="F4F7FA"/>
           </a:solidFill>
           <a:ln w="9525">
             <a:solidFill>
-              <a:srgbClr val="DEE3F0"/>
+              <a:srgbClr val="D8E1EE"/>
             </a:solidFill>
           </a:ln>
           <a:effectLst/>
@@ -9363,11 +9363,11 @@
             </a:avLst>
           </a:prstGeom>
           <a:solidFill>
-            <a:srgbClr val="F6F8FD"/>
+            <a:srgbClr val="F4F7FA"/>
           </a:solidFill>
           <a:ln w="9525">
             <a:solidFill>
-              <a:srgbClr val="DEE3F0"/>
+              <a:srgbClr val="D8E1EE"/>
             </a:solidFill>
           </a:ln>
           <a:effectLst/>
@@ -9477,7 +9477,7 @@
             <a:avLst/>
           </a:prstGeom>
           <a:solidFill>
-            <a:srgbClr val="DEE3F0"/>
+            <a:srgbClr val="D8E1EE"/>
           </a:solidFill>
           <a:ln>
             <a:noFill/>
@@ -9607,7 +9607,7 @@
             <a:avLst/>
           </a:prstGeom>
           <a:solidFill>
-            <a:srgbClr val="F4F6FC"/>
+            <a:srgbClr val="F3F8F6"/>
           </a:solidFill>
           <a:ln>
             <a:noFill/>
@@ -9667,7 +9667,7 @@
             <a:avLst/>
           </a:prstGeom>
           <a:solidFill>
-            <a:srgbClr val="F8F8FA"/>
+            <a:srgbClr val="F8F9FA"/>
           </a:solidFill>
           <a:ln>
             <a:noFill/>
@@ -9712,7 +9712,7 @@
             <a:r>
               <a:rPr sz="1950" b="1" spc="160">
                 <a:solidFill>
-                  <a:srgbClr val="2457D6"/>
+                  <a:srgbClr val="1E7F5B"/>
                 </a:solidFill>
                 <a:latin typeface="Pretendard"/>
                 <a:ea typeface="Pretendard"/>
@@ -9753,7 +9753,7 @@
             <a:r>
               <a:rPr sz="5100" b="1">
                 <a:solidFill>
-                  <a:srgbClr val="1E2A6E"/>
+                  <a:srgbClr val="1E3E69"/>
                 </a:solidFill>
                 <a:latin typeface="Pretendard"/>
                 <a:ea typeface="Pretendard"/>
@@ -9779,7 +9779,7 @@
             <a:avLst/>
           </a:prstGeom>
           <a:solidFill>
-            <a:srgbClr val="1E2A6E"/>
+            <a:srgbClr val="1E3E69"/>
           </a:solidFill>
           <a:ln>
             <a:noFill/>
@@ -10099,7 +10099,7 @@
             <a:r>
               <a:rPr sz="2175" b="1">
                 <a:solidFill>
-                  <a:srgbClr val="1E2A6E"/>
+                  <a:srgbClr val="1E3E69"/>
                 </a:solidFill>
                 <a:latin typeface="Pretendard"/>
                 <a:ea typeface="Pretendard"/>
@@ -10125,7 +10125,7 @@
             <a:avLst/>
           </a:prstGeom>
           <a:solidFill>
-            <a:srgbClr val="DEE3F0"/>
+            <a:srgbClr val="D8E1EE"/>
           </a:solidFill>
           <a:ln>
             <a:noFill/>
@@ -10303,7 +10303,7 @@
             <a:r>
               <a:rPr sz="2175" b="1">
                 <a:solidFill>
-                  <a:srgbClr val="1E2A6E"/>
+                  <a:srgbClr val="1E3E69"/>
                 </a:solidFill>
                 <a:latin typeface="Pretendard"/>
                 <a:ea typeface="Pretendard"/>
@@ -10477,7 +10477,7 @@
             <a:r>
               <a:rPr sz="2175" b="1">
                 <a:solidFill>
-                  <a:srgbClr val="1E2A6E"/>
+                  <a:srgbClr val="1E3E69"/>
                 </a:solidFill>
                 <a:latin typeface="Pretendard"/>
                 <a:ea typeface="Pretendard"/>
@@ -10503,7 +10503,7 @@
             <a:avLst/>
           </a:prstGeom>
           <a:solidFill>
-            <a:srgbClr val="DEE3F0"/>
+            <a:srgbClr val="D8E1EE"/>
           </a:solidFill>
           <a:ln>
             <a:noFill/>
@@ -10681,7 +10681,7 @@
             <a:r>
               <a:rPr sz="2175" b="1">
                 <a:solidFill>
-                  <a:srgbClr val="1E2A6E"/>
+                  <a:srgbClr val="1E3E69"/>
                 </a:solidFill>
                 <a:latin typeface="Pretendard"/>
                 <a:ea typeface="Pretendard"/>
@@ -10855,7 +10855,7 @@
             <a:r>
               <a:rPr sz="2175" b="1">
                 <a:solidFill>
-                  <a:srgbClr val="1E2A6E"/>
+                  <a:srgbClr val="1E3E69"/>
                 </a:solidFill>
                 <a:latin typeface="Pretendard"/>
                 <a:ea typeface="Pretendard"/>
@@ -10881,7 +10881,7 @@
             <a:avLst/>
           </a:prstGeom>
           <a:solidFill>
-            <a:srgbClr val="DEE3F0"/>
+            <a:srgbClr val="D8E1EE"/>
           </a:solidFill>
           <a:ln>
             <a:noFill/>
@@ -11059,7 +11059,7 @@
             <a:r>
               <a:rPr sz="2175" b="1">
                 <a:solidFill>
-                  <a:srgbClr val="1E2A6E"/>
+                  <a:srgbClr val="1E3E69"/>
                 </a:solidFill>
                 <a:latin typeface="Pretendard"/>
                 <a:ea typeface="Pretendard"/>
@@ -11233,7 +11233,7 @@
             <a:r>
               <a:rPr sz="2175" b="1">
                 <a:solidFill>
-                  <a:srgbClr val="1E2A6E"/>
+                  <a:srgbClr val="1E3E69"/>
                 </a:solidFill>
                 <a:latin typeface="Pretendard"/>
                 <a:ea typeface="Pretendard"/>
@@ -11259,7 +11259,7 @@
             <a:avLst/>
           </a:prstGeom>
           <a:solidFill>
-            <a:srgbClr val="DEE3F0"/>
+            <a:srgbClr val="D8E1EE"/>
           </a:solidFill>
           <a:ln>
             <a:noFill/>
@@ -11437,7 +11437,7 @@
             <a:r>
               <a:rPr sz="2175" b="1">
                 <a:solidFill>
-                  <a:srgbClr val="1E2A6E"/>
+                  <a:srgbClr val="1E3E69"/>
                 </a:solidFill>
                 <a:latin typeface="Pretendard"/>
                 <a:ea typeface="Pretendard"/>
@@ -11463,7 +11463,7 @@
             <a:avLst/>
           </a:prstGeom>
           <a:solidFill>
-            <a:srgbClr val="DEE3F0"/>
+            <a:srgbClr val="D8E1EE"/>
           </a:solidFill>
           <a:ln>
             <a:noFill/>
@@ -11593,7 +11593,7 @@
             <a:avLst/>
           </a:prstGeom>
           <a:solidFill>
-            <a:srgbClr val="F4F6FC"/>
+            <a:srgbClr val="F3F8F6"/>
           </a:solidFill>
           <a:ln>
             <a:noFill/>
@@ -11653,7 +11653,7 @@
             <a:avLst/>
           </a:prstGeom>
           <a:solidFill>
-            <a:srgbClr val="F8F8FA"/>
+            <a:srgbClr val="F8F9FA"/>
           </a:solidFill>
           <a:ln>
             <a:noFill/>
@@ -11698,7 +11698,7 @@
             <a:r>
               <a:rPr sz="1950" b="1" spc="160">
                 <a:solidFill>
-                  <a:srgbClr val="2457D6"/>
+                  <a:srgbClr val="1E7F5B"/>
                 </a:solidFill>
                 <a:latin typeface="Pretendard"/>
                 <a:ea typeface="Pretendard"/>
@@ -11739,7 +11739,7 @@
             <a:r>
               <a:rPr sz="5100" b="1">
                 <a:solidFill>
-                  <a:srgbClr val="1E2A6E"/>
+                  <a:srgbClr val="1E3E69"/>
                 </a:solidFill>
                 <a:latin typeface="Pretendard"/>
                 <a:ea typeface="Pretendard"/>
@@ -11765,7 +11765,7 @@
             <a:avLst/>
           </a:prstGeom>
           <a:solidFill>
-            <a:srgbClr val="1E2A6E"/>
+            <a:srgbClr val="1E3E69"/>
           </a:solidFill>
           <a:ln>
             <a:noFill/>
@@ -11795,7 +11795,7 @@
             <a:avLst/>
           </a:prstGeom>
           <a:solidFill>
-            <a:srgbClr val="1E2A6E"/>
+            <a:srgbClr val="1E3E69"/>
           </a:solidFill>
           <a:ln>
             <a:noFill/>
@@ -11840,7 +11840,7 @@
             <a:r>
               <a:rPr sz="3000" b="1">
                 <a:solidFill>
-                  <a:srgbClr val="C9D7FF"/>
+                  <a:srgbClr val="C3E6D8"/>
                 </a:solidFill>
                 <a:latin typeface="Pretendard"/>
                 <a:ea typeface="Pretendard"/>
@@ -11907,11 +11907,11 @@
             <a:avLst/>
           </a:prstGeom>
           <a:solidFill>
-            <a:srgbClr val="F6F8FD"/>
+            <a:srgbClr val="F4F7FA"/>
           </a:solidFill>
           <a:ln w="9525">
             <a:solidFill>
-              <a:srgbClr val="DEE3F0"/>
+              <a:srgbClr val="D8E1EE"/>
             </a:solidFill>
           </a:ln>
           <a:effectLst/>
@@ -11954,7 +11954,7 @@
             <a:r>
               <a:rPr sz="3000" b="1">
                 <a:solidFill>
-                  <a:srgbClr val="2457D6"/>
+                  <a:srgbClr val="1E7F5B"/>
                 </a:solidFill>
                 <a:latin typeface="Pretendard"/>
                 <a:ea typeface="Pretendard"/>
@@ -12021,7 +12021,7 @@
             <a:avLst/>
           </a:prstGeom>
           <a:solidFill>
-            <a:srgbClr val="1E2A6E"/>
+            <a:srgbClr val="1E3E69"/>
           </a:solidFill>
           <a:ln>
             <a:noFill/>
@@ -12066,7 +12066,7 @@
             <a:r>
               <a:rPr sz="3000" b="1">
                 <a:solidFill>
-                  <a:srgbClr val="C9D7FF"/>
+                  <a:srgbClr val="C3E6D8"/>
                 </a:solidFill>
                 <a:latin typeface="Pretendard"/>
                 <a:ea typeface="Pretendard"/>
@@ -12133,11 +12133,11 @@
             <a:avLst/>
           </a:prstGeom>
           <a:solidFill>
-            <a:srgbClr val="F6F8FD"/>
+            <a:srgbClr val="F4F7FA"/>
           </a:solidFill>
           <a:ln w="9525">
             <a:solidFill>
-              <a:srgbClr val="DEE3F0"/>
+              <a:srgbClr val="D8E1EE"/>
             </a:solidFill>
           </a:ln>
           <a:effectLst/>
@@ -12180,7 +12180,7 @@
             <a:r>
               <a:rPr sz="3000" b="1">
                 <a:solidFill>
-                  <a:srgbClr val="2457D6"/>
+                  <a:srgbClr val="1E7F5B"/>
                 </a:solidFill>
                 <a:latin typeface="Pretendard"/>
                 <a:ea typeface="Pretendard"/>
@@ -12247,7 +12247,7 @@
             <a:avLst/>
           </a:prstGeom>
           <a:solidFill>
-            <a:srgbClr val="1E2A6E"/>
+            <a:srgbClr val="1E3E69"/>
           </a:solidFill>
           <a:ln>
             <a:noFill/>
@@ -12292,7 +12292,7 @@
             <a:r>
               <a:rPr sz="3000" b="1">
                 <a:solidFill>
-                  <a:srgbClr val="C9D7FF"/>
+                  <a:srgbClr val="C3E6D8"/>
                 </a:solidFill>
                 <a:latin typeface="Pretendard"/>
                 <a:ea typeface="Pretendard"/>
@@ -12359,11 +12359,11 @@
             <a:avLst/>
           </a:prstGeom>
           <a:solidFill>
-            <a:srgbClr val="F6F8FD"/>
+            <a:srgbClr val="F4F7FA"/>
           </a:solidFill>
           <a:ln w="9525">
             <a:solidFill>
-              <a:srgbClr val="DEE3F0"/>
+              <a:srgbClr val="D8E1EE"/>
             </a:solidFill>
           </a:ln>
           <a:effectLst/>
@@ -12406,7 +12406,7 @@
             <a:r>
               <a:rPr sz="3000" b="1">
                 <a:solidFill>
-                  <a:srgbClr val="2457D6"/>
+                  <a:srgbClr val="1E7F5B"/>
                 </a:solidFill>
                 <a:latin typeface="Pretendard"/>
                 <a:ea typeface="Pretendard"/>
@@ -12473,7 +12473,7 @@
             <a:avLst/>
           </a:prstGeom>
           <a:solidFill>
-            <a:srgbClr val="1E2A6E"/>
+            <a:srgbClr val="1E3E69"/>
           </a:solidFill>
           <a:ln>
             <a:noFill/>
@@ -12518,7 +12518,7 @@
             <a:r>
               <a:rPr sz="3000" b="1">
                 <a:solidFill>
-                  <a:srgbClr val="C9D7FF"/>
+                  <a:srgbClr val="C3E6D8"/>
                 </a:solidFill>
                 <a:latin typeface="Pretendard"/>
                 <a:ea typeface="Pretendard"/>
@@ -12585,11 +12585,11 @@
             <a:avLst/>
           </a:prstGeom>
           <a:solidFill>
-            <a:srgbClr val="F6F8FD"/>
+            <a:srgbClr val="F4F7FA"/>
           </a:solidFill>
           <a:ln w="9525">
             <a:solidFill>
-              <a:srgbClr val="DEE3F0"/>
+              <a:srgbClr val="D8E1EE"/>
             </a:solidFill>
           </a:ln>
           <a:effectLst/>
@@ -12632,7 +12632,7 @@
             <a:r>
               <a:rPr sz="3000" b="1">
                 <a:solidFill>
-                  <a:srgbClr val="2457D6"/>
+                  <a:srgbClr val="1E7F5B"/>
                 </a:solidFill>
                 <a:latin typeface="Pretendard"/>
                 <a:ea typeface="Pretendard"/>
@@ -12699,7 +12699,7 @@
             <a:avLst/>
           </a:prstGeom>
           <a:solidFill>
-            <a:srgbClr val="DEE3F0"/>
+            <a:srgbClr val="D8E1EE"/>
           </a:solidFill>
           <a:ln>
             <a:noFill/>
@@ -12829,7 +12829,7 @@
             <a:avLst/>
           </a:prstGeom>
           <a:solidFill>
-            <a:srgbClr val="F4F6FC"/>
+            <a:srgbClr val="F3F8F6"/>
           </a:solidFill>
           <a:ln>
             <a:noFill/>
@@ -12889,7 +12889,7 @@
             <a:avLst/>
           </a:prstGeom>
           <a:solidFill>
-            <a:srgbClr val="F8F8FA"/>
+            <a:srgbClr val="F8F9FA"/>
           </a:solidFill>
           <a:ln>
             <a:noFill/>
@@ -12934,7 +12934,7 @@
             <a:r>
               <a:rPr sz="1950" b="1" spc="160">
                 <a:solidFill>
-                  <a:srgbClr val="2457D6"/>
+                  <a:srgbClr val="1E7F5B"/>
                 </a:solidFill>
                 <a:latin typeface="Pretendard"/>
                 <a:ea typeface="Pretendard"/>
@@ -12975,7 +12975,7 @@
             <a:r>
               <a:rPr sz="5100" b="1">
                 <a:solidFill>
-                  <a:srgbClr val="1E2A6E"/>
+                  <a:srgbClr val="1E3E69"/>
                 </a:solidFill>
                 <a:latin typeface="Pretendard"/>
                 <a:ea typeface="Pretendard"/>
@@ -13001,7 +13001,7 @@
             <a:avLst/>
           </a:prstGeom>
           <a:solidFill>
-            <a:srgbClr val="1E2A6E"/>
+            <a:srgbClr val="1E3E69"/>
           </a:solidFill>
           <a:ln>
             <a:noFill/>
@@ -13033,11 +13033,11 @@
             </a:avLst>
           </a:prstGeom>
           <a:solidFill>
-            <a:srgbClr val="F6F8FD"/>
+            <a:srgbClr val="F4F7FA"/>
           </a:solidFill>
           <a:ln w="9525">
             <a:solidFill>
-              <a:srgbClr val="DEE3F0"/>
+              <a:srgbClr val="D8E1EE"/>
             </a:solidFill>
           </a:ln>
           <a:effectLst/>
@@ -13071,7 +13071,7 @@
           </a:solidFill>
           <a:ln w="28575">
             <a:solidFill>
-              <a:srgbClr val="1E2A6E"/>
+              <a:srgbClr val="1E3E69"/>
             </a:solidFill>
           </a:ln>
           <a:effectLst/>
@@ -13114,7 +13114,7 @@
             <a:r>
               <a:rPr sz="2400" b="1">
                 <a:solidFill>
-                  <a:srgbClr val="1E2A6E"/>
+                  <a:srgbClr val="1E3E69"/>
                 </a:solidFill>
                 <a:latin typeface="Pretendard"/>
                 <a:ea typeface="Pretendard"/>
@@ -13142,11 +13142,11 @@
             </a:avLst>
           </a:prstGeom>
           <a:solidFill>
-            <a:srgbClr val="F6F8FD"/>
+            <a:srgbClr val="F4F7FA"/>
           </a:solidFill>
           <a:ln w="9525">
             <a:solidFill>
-              <a:srgbClr val="DEE3F0"/>
+              <a:srgbClr val="D8E1EE"/>
             </a:solidFill>
           </a:ln>
           <a:effectLst/>
@@ -13180,7 +13180,7 @@
           </a:solidFill>
           <a:ln w="28575">
             <a:solidFill>
-              <a:srgbClr val="1E2A6E"/>
+              <a:srgbClr val="1E3E69"/>
             </a:solidFill>
           </a:ln>
           <a:effectLst/>
@@ -13223,7 +13223,7 @@
             <a:r>
               <a:rPr sz="2400" b="1">
                 <a:solidFill>
-                  <a:srgbClr val="1E2A6E"/>
+                  <a:srgbClr val="1E3E69"/>
                 </a:solidFill>
                 <a:latin typeface="Pretendard"/>
                 <a:ea typeface="Pretendard"/>
@@ -13251,11 +13251,11 @@
             </a:avLst>
           </a:prstGeom>
           <a:solidFill>
-            <a:srgbClr val="F6F8FD"/>
+            <a:srgbClr val="F4F7FA"/>
           </a:solidFill>
           <a:ln w="9525">
             <a:solidFill>
-              <a:srgbClr val="DEE3F0"/>
+              <a:srgbClr val="D8E1EE"/>
             </a:solidFill>
           </a:ln>
           <a:effectLst/>
@@ -13289,7 +13289,7 @@
           </a:solidFill>
           <a:ln w="28575">
             <a:solidFill>
-              <a:srgbClr val="1E2A6E"/>
+              <a:srgbClr val="1E3E69"/>
             </a:solidFill>
           </a:ln>
           <a:effectLst/>
@@ -13332,7 +13332,7 @@
             <a:r>
               <a:rPr sz="2400" b="1">
                 <a:solidFill>
-                  <a:srgbClr val="1E2A6E"/>
+                  <a:srgbClr val="1E3E69"/>
                 </a:solidFill>
                 <a:latin typeface="Pretendard"/>
                 <a:ea typeface="Pretendard"/>
@@ -13360,11 +13360,11 @@
             </a:avLst>
           </a:prstGeom>
           <a:solidFill>
-            <a:srgbClr val="F6F8FD"/>
+            <a:srgbClr val="F4F7FA"/>
           </a:solidFill>
           <a:ln w="9525">
             <a:solidFill>
-              <a:srgbClr val="DEE3F0"/>
+              <a:srgbClr val="D8E1EE"/>
             </a:solidFill>
           </a:ln>
           <a:effectLst/>
@@ -13398,7 +13398,7 @@
           </a:solidFill>
           <a:ln w="28575">
             <a:solidFill>
-              <a:srgbClr val="1E2A6E"/>
+              <a:srgbClr val="1E3E69"/>
             </a:solidFill>
           </a:ln>
           <a:effectLst/>
@@ -13441,7 +13441,7 @@
             <a:r>
               <a:rPr sz="2400" b="1">
                 <a:solidFill>
-                  <a:srgbClr val="1E2A6E"/>
+                  <a:srgbClr val="1E3E69"/>
                 </a:solidFill>
                 <a:latin typeface="Pretendard"/>
                 <a:ea typeface="Pretendard"/>
@@ -13469,11 +13469,11 @@
             </a:avLst>
           </a:prstGeom>
           <a:solidFill>
-            <a:srgbClr val="F6F8FD"/>
+            <a:srgbClr val="F4F7FA"/>
           </a:solidFill>
           <a:ln w="9525">
             <a:solidFill>
-              <a:srgbClr val="DEE3F0"/>
+              <a:srgbClr val="D8E1EE"/>
             </a:solidFill>
           </a:ln>
           <a:effectLst/>
@@ -13507,7 +13507,7 @@
           </a:solidFill>
           <a:ln w="28575">
             <a:solidFill>
-              <a:srgbClr val="1E2A6E"/>
+              <a:srgbClr val="1E3E69"/>
             </a:solidFill>
           </a:ln>
           <a:effectLst/>
@@ -13550,7 +13550,7 @@
             <a:r>
               <a:rPr sz="2400" b="1">
                 <a:solidFill>
-                  <a:srgbClr val="1E2A6E"/>
+                  <a:srgbClr val="1E3E69"/>
                 </a:solidFill>
                 <a:latin typeface="Pretendard"/>
                 <a:ea typeface="Pretendard"/>
@@ -13578,11 +13578,11 @@
             </a:avLst>
           </a:prstGeom>
           <a:solidFill>
-            <a:srgbClr val="F6F8FD"/>
+            <a:srgbClr val="F4F7FA"/>
           </a:solidFill>
           <a:ln w="9525">
             <a:solidFill>
-              <a:srgbClr val="DEE3F0"/>
+              <a:srgbClr val="D8E1EE"/>
             </a:solidFill>
           </a:ln>
           <a:effectLst/>
@@ -13616,7 +13616,7 @@
           </a:solidFill>
           <a:ln w="28575">
             <a:solidFill>
-              <a:srgbClr val="1E2A6E"/>
+              <a:srgbClr val="1E3E69"/>
             </a:solidFill>
           </a:ln>
           <a:effectLst/>
@@ -13659,7 +13659,7 @@
             <a:r>
               <a:rPr sz="2400" b="1">
                 <a:solidFill>
-                  <a:srgbClr val="1E2A6E"/>
+                  <a:srgbClr val="1E3E69"/>
                 </a:solidFill>
                 <a:latin typeface="Pretendard"/>
                 <a:ea typeface="Pretendard"/>
@@ -13685,7 +13685,7 @@
             <a:avLst/>
           </a:prstGeom>
           <a:solidFill>
-            <a:srgbClr val="DEE3F0"/>
+            <a:srgbClr val="D8E1EE"/>
           </a:solidFill>
           <a:ln>
             <a:noFill/>
@@ -13815,7 +13815,7 @@
             <a:avLst/>
           </a:prstGeom>
           <a:solidFill>
-            <a:srgbClr val="F4F6FC"/>
+            <a:srgbClr val="F3F8F6"/>
           </a:solidFill>
           <a:ln>
             <a:noFill/>
@@ -13875,7 +13875,7 @@
             <a:avLst/>
           </a:prstGeom>
           <a:solidFill>
-            <a:srgbClr val="F8F8FA"/>
+            <a:srgbClr val="F8F9FA"/>
           </a:solidFill>
           <a:ln>
             <a:noFill/>
@@ -13920,7 +13920,7 @@
             <a:r>
               <a:rPr sz="1950" b="1" spc="160">
                 <a:solidFill>
-                  <a:srgbClr val="2457D6"/>
+                  <a:srgbClr val="1E7F5B"/>
                 </a:solidFill>
                 <a:latin typeface="Pretendard"/>
                 <a:ea typeface="Pretendard"/>
@@ -13961,7 +13961,7 @@
             <a:r>
               <a:rPr sz="5100" b="1">
                 <a:solidFill>
-                  <a:srgbClr val="1E2A6E"/>
+                  <a:srgbClr val="1E3E69"/>
                 </a:solidFill>
                 <a:latin typeface="Pretendard"/>
                 <a:ea typeface="Pretendard"/>
@@ -13987,7 +13987,7 @@
             <a:avLst/>
           </a:prstGeom>
           <a:solidFill>
-            <a:srgbClr val="1E2A6E"/>
+            <a:srgbClr val="1E3E69"/>
           </a:solidFill>
           <a:ln>
             <a:noFill/>
@@ -14019,11 +14019,11 @@
             </a:avLst>
           </a:prstGeom>
           <a:solidFill>
-            <a:srgbClr val="F6F8FD"/>
+            <a:srgbClr val="F4F7FA"/>
           </a:solidFill>
           <a:ln w="9525">
             <a:solidFill>
-              <a:srgbClr val="DEE3F0"/>
+              <a:srgbClr val="D8E1EE"/>
             </a:solidFill>
           </a:ln>
           <a:effectLst/>
@@ -14051,7 +14051,7 @@
             <a:avLst/>
           </a:prstGeom>
           <a:solidFill>
-            <a:srgbClr val="1E2A6E"/>
+            <a:srgbClr val="1E3E69"/>
           </a:solidFill>
           <a:ln>
             <a:noFill/>
@@ -14137,7 +14137,7 @@
             <a:r>
               <a:rPr sz="2325" b="1">
                 <a:solidFill>
-                  <a:srgbClr val="1E2A6E"/>
+                  <a:srgbClr val="1E3E69"/>
                 </a:solidFill>
                 <a:latin typeface="Pretendard"/>
                 <a:ea typeface="Pretendard"/>
@@ -14165,11 +14165,11 @@
             </a:avLst>
           </a:prstGeom>
           <a:solidFill>
-            <a:srgbClr val="F6F8FD"/>
+            <a:srgbClr val="F4F7FA"/>
           </a:solidFill>
           <a:ln w="9525">
             <a:solidFill>
-              <a:srgbClr val="DEE3F0"/>
+              <a:srgbClr val="D8E1EE"/>
             </a:solidFill>
           </a:ln>
           <a:effectLst/>
@@ -14197,7 +14197,7 @@
             <a:avLst/>
           </a:prstGeom>
           <a:solidFill>
-            <a:srgbClr val="1E2A6E"/>
+            <a:srgbClr val="1E3E69"/>
           </a:solidFill>
           <a:ln>
             <a:noFill/>
@@ -14283,7 +14283,7 @@
             <a:r>
               <a:rPr sz="2325" b="1">
                 <a:solidFill>
-                  <a:srgbClr val="1E2A6E"/>
+                  <a:srgbClr val="1E3E69"/>
                 </a:solidFill>
                 <a:latin typeface="Pretendard"/>
                 <a:ea typeface="Pretendard"/>
@@ -14311,11 +14311,11 @@
             </a:avLst>
           </a:prstGeom>
           <a:solidFill>
-            <a:srgbClr val="F6F8FD"/>
+            <a:srgbClr val="F4F7FA"/>
           </a:solidFill>
           <a:ln w="9525">
             <a:solidFill>
-              <a:srgbClr val="DEE3F0"/>
+              <a:srgbClr val="D8E1EE"/>
             </a:solidFill>
           </a:ln>
           <a:effectLst/>
@@ -14343,7 +14343,7 @@
             <a:avLst/>
           </a:prstGeom>
           <a:solidFill>
-            <a:srgbClr val="1E2A6E"/>
+            <a:srgbClr val="1E3E69"/>
           </a:solidFill>
           <a:ln>
             <a:noFill/>
@@ -14429,7 +14429,7 @@
             <a:r>
               <a:rPr sz="2325" b="1">
                 <a:solidFill>
-                  <a:srgbClr val="1E2A6E"/>
+                  <a:srgbClr val="1E3E69"/>
                 </a:solidFill>
                 <a:latin typeface="Pretendard"/>
                 <a:ea typeface="Pretendard"/>
@@ -14457,11 +14457,11 @@
             </a:avLst>
           </a:prstGeom>
           <a:solidFill>
-            <a:srgbClr val="F6F8FD"/>
+            <a:srgbClr val="F4F7FA"/>
           </a:solidFill>
           <a:ln w="9525">
             <a:solidFill>
-              <a:srgbClr val="DEE3F0"/>
+              <a:srgbClr val="D8E1EE"/>
             </a:solidFill>
           </a:ln>
           <a:effectLst/>
@@ -14489,7 +14489,7 @@
             <a:avLst/>
           </a:prstGeom>
           <a:solidFill>
-            <a:srgbClr val="1E2A6E"/>
+            <a:srgbClr val="1E3E69"/>
           </a:solidFill>
           <a:ln>
             <a:noFill/>
@@ -14575,7 +14575,7 @@
             <a:r>
               <a:rPr sz="2325" b="1">
                 <a:solidFill>
-                  <a:srgbClr val="1E2A6E"/>
+                  <a:srgbClr val="1E3E69"/>
                 </a:solidFill>
                 <a:latin typeface="Pretendard"/>
                 <a:ea typeface="Pretendard"/>
@@ -14603,11 +14603,11 @@
             </a:avLst>
           </a:prstGeom>
           <a:solidFill>
-            <a:srgbClr val="EAF0FF"/>
+            <a:srgbClr val="E6F4EE"/>
           </a:solidFill>
           <a:ln w="9525">
             <a:solidFill>
-              <a:srgbClr val="C9D7FF"/>
+              <a:srgbClr val="C3E6D8"/>
             </a:solidFill>
           </a:ln>
           <a:effectLst/>
@@ -14650,7 +14650,7 @@
             <a:r>
               <a:rPr sz="2475" b="1">
                 <a:solidFill>
-                  <a:srgbClr val="1E2A6E"/>
+                  <a:srgbClr val="1E3E69"/>
                 </a:solidFill>
                 <a:latin typeface="Pretendard"/>
                 <a:ea typeface="Pretendard"/>
@@ -14676,7 +14676,7 @@
             <a:avLst/>
           </a:prstGeom>
           <a:solidFill>
-            <a:srgbClr val="DEE3F0"/>
+            <a:srgbClr val="D8E1EE"/>
           </a:solidFill>
           <a:ln>
             <a:noFill/>
@@ -14806,7 +14806,7 @@
             <a:avLst/>
           </a:prstGeom>
           <a:solidFill>
-            <a:srgbClr val="F4F6FC"/>
+            <a:srgbClr val="F3F8F6"/>
           </a:solidFill>
           <a:ln>
             <a:noFill/>
@@ -14866,7 +14866,7 @@
             <a:avLst/>
           </a:prstGeom>
           <a:solidFill>
-            <a:srgbClr val="F8F8FA"/>
+            <a:srgbClr val="F8F9FA"/>
           </a:solidFill>
           <a:ln>
             <a:noFill/>
@@ -14911,7 +14911,7 @@
             <a:r>
               <a:rPr sz="1950" b="1" spc="160">
                 <a:solidFill>
-                  <a:srgbClr val="2457D6"/>
+                  <a:srgbClr val="1E7F5B"/>
                 </a:solidFill>
                 <a:latin typeface="Pretendard"/>
                 <a:ea typeface="Pretendard"/>
@@ -14952,7 +14952,7 @@
             <a:r>
               <a:rPr sz="5100" b="1">
                 <a:solidFill>
-                  <a:srgbClr val="1E2A6E"/>
+                  <a:srgbClr val="1E3E69"/>
                 </a:solidFill>
                 <a:latin typeface="Pretendard"/>
                 <a:ea typeface="Pretendard"/>
@@ -14978,7 +14978,7 @@
             <a:avLst/>
           </a:prstGeom>
           <a:solidFill>
-            <a:srgbClr val="1E2A6E"/>
+            <a:srgbClr val="1E3E69"/>
           </a:solidFill>
           <a:ln>
             <a:noFill/>
@@ -15010,11 +15010,11 @@
             </a:avLst>
           </a:prstGeom>
           <a:solidFill>
-            <a:srgbClr val="F6F8FD"/>
+            <a:srgbClr val="F4F7FA"/>
           </a:solidFill>
           <a:ln w="9525">
             <a:solidFill>
-              <a:srgbClr val="DEE3F0"/>
+              <a:srgbClr val="D8E1EE"/>
             </a:solidFill>
           </a:ln>
           <a:effectLst/>
@@ -15042,7 +15042,7 @@
             <a:avLst/>
           </a:prstGeom>
           <a:solidFill>
-            <a:srgbClr val="1E2A6E"/>
+            <a:srgbClr val="1E3E69"/>
           </a:solidFill>
           <a:ln>
             <a:noFill/>
@@ -15128,7 +15128,7 @@
             <a:r>
               <a:rPr sz="2325" b="1">
                 <a:solidFill>
-                  <a:srgbClr val="1E2A6E"/>
+                  <a:srgbClr val="1E3E69"/>
                 </a:solidFill>
                 <a:latin typeface="Pretendard"/>
                 <a:ea typeface="Pretendard"/>
@@ -15156,11 +15156,11 @@
             </a:avLst>
           </a:prstGeom>
           <a:solidFill>
-            <a:srgbClr val="F6F8FD"/>
+            <a:srgbClr val="F4F7FA"/>
           </a:solidFill>
           <a:ln w="9525">
             <a:solidFill>
-              <a:srgbClr val="DEE3F0"/>
+              <a:srgbClr val="D8E1EE"/>
             </a:solidFill>
           </a:ln>
           <a:effectLst/>
@@ -15188,7 +15188,7 @@
             <a:avLst/>
           </a:prstGeom>
           <a:solidFill>
-            <a:srgbClr val="1E2A6E"/>
+            <a:srgbClr val="1E3E69"/>
           </a:solidFill>
           <a:ln>
             <a:noFill/>
@@ -15274,7 +15274,7 @@
             <a:r>
               <a:rPr sz="2325" b="1">
                 <a:solidFill>
-                  <a:srgbClr val="1E2A6E"/>
+                  <a:srgbClr val="1E3E69"/>
                 </a:solidFill>
                 <a:latin typeface="Pretendard"/>
                 <a:ea typeface="Pretendard"/>
@@ -15302,11 +15302,11 @@
             </a:avLst>
           </a:prstGeom>
           <a:solidFill>
-            <a:srgbClr val="F6F8FD"/>
+            <a:srgbClr val="F4F7FA"/>
           </a:solidFill>
           <a:ln w="9525">
             <a:solidFill>
-              <a:srgbClr val="DEE3F0"/>
+              <a:srgbClr val="D8E1EE"/>
             </a:solidFill>
           </a:ln>
           <a:effectLst/>
@@ -15334,7 +15334,7 @@
             <a:avLst/>
           </a:prstGeom>
           <a:solidFill>
-            <a:srgbClr val="1E2A6E"/>
+            <a:srgbClr val="1E3E69"/>
           </a:solidFill>
           <a:ln>
             <a:noFill/>
@@ -15420,7 +15420,7 @@
             <a:r>
               <a:rPr sz="2325" b="1">
                 <a:solidFill>
-                  <a:srgbClr val="1E2A6E"/>
+                  <a:srgbClr val="1E3E69"/>
                 </a:solidFill>
                 <a:latin typeface="Pretendard"/>
                 <a:ea typeface="Pretendard"/>
@@ -15448,11 +15448,11 @@
             </a:avLst>
           </a:prstGeom>
           <a:solidFill>
-            <a:srgbClr val="F6F8FD"/>
+            <a:srgbClr val="F4F7FA"/>
           </a:solidFill>
           <a:ln w="9525">
             <a:solidFill>
-              <a:srgbClr val="DEE3F0"/>
+              <a:srgbClr val="D8E1EE"/>
             </a:solidFill>
           </a:ln>
           <a:effectLst/>
@@ -15480,7 +15480,7 @@
             <a:avLst/>
           </a:prstGeom>
           <a:solidFill>
-            <a:srgbClr val="1E2A6E"/>
+            <a:srgbClr val="1E3E69"/>
           </a:solidFill>
           <a:ln>
             <a:noFill/>
@@ -15566,7 +15566,7 @@
             <a:r>
               <a:rPr sz="2325" b="1">
                 <a:solidFill>
-                  <a:srgbClr val="1E2A6E"/>
+                  <a:srgbClr val="1E3E69"/>
                 </a:solidFill>
                 <a:latin typeface="Pretendard"/>
                 <a:ea typeface="Pretendard"/>
@@ -15594,11 +15594,11 @@
             </a:avLst>
           </a:prstGeom>
           <a:solidFill>
-            <a:srgbClr val="EAF0FF"/>
+            <a:srgbClr val="E6F4EE"/>
           </a:solidFill>
           <a:ln w="9525">
             <a:solidFill>
-              <a:srgbClr val="C9D7FF"/>
+              <a:srgbClr val="C3E6D8"/>
             </a:solidFill>
           </a:ln>
           <a:effectLst/>
@@ -15641,7 +15641,7 @@
             <a:r>
               <a:rPr sz="2475" b="1">
                 <a:solidFill>
-                  <a:srgbClr val="1E2A6E"/>
+                  <a:srgbClr val="1E3E69"/>
                 </a:solidFill>
                 <a:latin typeface="Pretendard"/>
                 <a:ea typeface="Pretendard"/>
@@ -15667,7 +15667,7 @@
             <a:avLst/>
           </a:prstGeom>
           <a:solidFill>
-            <a:srgbClr val="DEE3F0"/>
+            <a:srgbClr val="D8E1EE"/>
           </a:solidFill>
           <a:ln>
             <a:noFill/>
@@ -15797,7 +15797,7 @@
             <a:avLst/>
           </a:prstGeom>
           <a:solidFill>
-            <a:srgbClr val="F4F6FC"/>
+            <a:srgbClr val="F3F8F6"/>
           </a:solidFill>
           <a:ln>
             <a:noFill/>
@@ -15827,7 +15827,7 @@
             <a:avLst/>
           </a:prstGeom>
           <a:solidFill>
-            <a:srgbClr val="F6F6F9"/>
+            <a:srgbClr val="F6F7F9"/>
           </a:solidFill>
           <a:ln>
             <a:noFill/>
@@ -15857,7 +15857,7 @@
             <a:avLst/>
           </a:prstGeom>
           <a:solidFill>
-            <a:srgbClr val="1E2A6E"/>
+            <a:srgbClr val="1E3E69"/>
           </a:solidFill>
           <a:ln>
             <a:noFill/>
@@ -15902,7 +15902,7 @@
             <a:r>
               <a:rPr sz="2400" b="1">
                 <a:solidFill>
-                  <a:srgbClr val="2457D6"/>
+                  <a:srgbClr val="1E7F5B"/>
                 </a:solidFill>
                 <a:latin typeface="Pretendard"/>
                 <a:ea typeface="Pretendard"/>
@@ -15943,7 +15943,7 @@
             <a:r>
               <a:rPr sz="5100" b="1">
                 <a:solidFill>
-                  <a:srgbClr val="1E2A6E"/>
+                  <a:srgbClr val="1E3E69"/>
                 </a:solidFill>
                 <a:latin typeface="Pretendard"/>
                 <a:ea typeface="Pretendard"/>
@@ -16012,11 +16012,11 @@
             </a:avLst>
           </a:prstGeom>
           <a:solidFill>
-            <a:srgbClr val="F6F8FD"/>
+            <a:srgbClr val="F4F7FA"/>
           </a:solidFill>
           <a:ln w="9525">
             <a:solidFill>
-              <a:srgbClr val="DEE3F0"/>
+              <a:srgbClr val="D8E1EE"/>
             </a:solidFill>
           </a:ln>
           <a:effectLst/>
@@ -16059,7 +16059,7 @@
             <a:r>
               <a:rPr sz="2475" b="1">
                 <a:solidFill>
-                  <a:srgbClr val="2457D6"/>
+                  <a:srgbClr val="1E7F5B"/>
                 </a:solidFill>
                 <a:latin typeface="Pretendard"/>
                 <a:ea typeface="Pretendard"/>
@@ -16100,7 +16100,7 @@
             <a:r>
               <a:rPr sz="2475" b="1">
                 <a:solidFill>
-                  <a:srgbClr val="1E2A6E"/>
+                  <a:srgbClr val="1E3E69"/>
                 </a:solidFill>
                 <a:latin typeface="Pretendard"/>
                 <a:ea typeface="Pretendard"/>
@@ -16128,11 +16128,11 @@
             </a:avLst>
           </a:prstGeom>
           <a:solidFill>
-            <a:srgbClr val="F6F8FD"/>
+            <a:srgbClr val="F4F7FA"/>
           </a:solidFill>
           <a:ln w="9525">
             <a:solidFill>
-              <a:srgbClr val="DEE3F0"/>
+              <a:srgbClr val="D8E1EE"/>
             </a:solidFill>
           </a:ln>
           <a:effectLst/>
@@ -16175,7 +16175,7 @@
             <a:r>
               <a:rPr sz="2475" b="1">
                 <a:solidFill>
-                  <a:srgbClr val="2457D6"/>
+                  <a:srgbClr val="1E7F5B"/>
                 </a:solidFill>
                 <a:latin typeface="Pretendard"/>
                 <a:ea typeface="Pretendard"/>
@@ -16216,7 +16216,7 @@
             <a:r>
               <a:rPr sz="2475" b="1">
                 <a:solidFill>
-                  <a:srgbClr val="1E2A6E"/>
+                  <a:srgbClr val="1E3E69"/>
                 </a:solidFill>
                 <a:latin typeface="Pretendard"/>
                 <a:ea typeface="Pretendard"/>
@@ -16244,11 +16244,11 @@
             </a:avLst>
           </a:prstGeom>
           <a:solidFill>
-            <a:srgbClr val="F6F8FD"/>
+            <a:srgbClr val="F4F7FA"/>
           </a:solidFill>
           <a:ln w="9525">
             <a:solidFill>
-              <a:srgbClr val="DEE3F0"/>
+              <a:srgbClr val="D8E1EE"/>
             </a:solidFill>
           </a:ln>
           <a:effectLst/>
@@ -16291,7 +16291,7 @@
             <a:r>
               <a:rPr sz="2475" b="1">
                 <a:solidFill>
-                  <a:srgbClr val="2457D6"/>
+                  <a:srgbClr val="1E7F5B"/>
                 </a:solidFill>
                 <a:latin typeface="Pretendard"/>
                 <a:ea typeface="Pretendard"/>
@@ -16332,7 +16332,7 @@
             <a:r>
               <a:rPr sz="2475" b="1">
                 <a:solidFill>
-                  <a:srgbClr val="1E2A6E"/>
+                  <a:srgbClr val="1E3E69"/>
                 </a:solidFill>
                 <a:latin typeface="Pretendard"/>
                 <a:ea typeface="Pretendard"/>
@@ -16360,11 +16360,11 @@
             </a:avLst>
           </a:prstGeom>
           <a:solidFill>
-            <a:srgbClr val="F6F8FD"/>
+            <a:srgbClr val="F4F7FA"/>
           </a:solidFill>
           <a:ln w="9525">
             <a:solidFill>
-              <a:srgbClr val="DEE3F0"/>
+              <a:srgbClr val="D8E1EE"/>
             </a:solidFill>
           </a:ln>
           <a:effectLst/>
@@ -16407,7 +16407,7 @@
             <a:r>
               <a:rPr sz="2475" b="1">
                 <a:solidFill>
-                  <a:srgbClr val="2457D6"/>
+                  <a:srgbClr val="1E7F5B"/>
                 </a:solidFill>
                 <a:latin typeface="Pretendard"/>
                 <a:ea typeface="Pretendard"/>
@@ -16448,7 +16448,7 @@
             <a:r>
               <a:rPr sz="2475" b="1">
                 <a:solidFill>
-                  <a:srgbClr val="1E2A6E"/>
+                  <a:srgbClr val="1E3E69"/>
                 </a:solidFill>
                 <a:latin typeface="Pretendard"/>
                 <a:ea typeface="Pretendard"/>
@@ -16474,7 +16474,7 @@
             <a:avLst/>
           </a:prstGeom>
           <a:solidFill>
-            <a:srgbClr val="2457D6"/>
+            <a:srgbClr val="1E7F5B"/>
           </a:solidFill>
           <a:ln>
             <a:noFill/>
@@ -16519,7 +16519,7 @@
             <a:r>
               <a:rPr sz="1800" b="1" spc="140">
                 <a:solidFill>
-                  <a:srgbClr val="2457D6"/>
+                  <a:srgbClr val="1E7F5B"/>
                 </a:solidFill>
                 <a:latin typeface="Pretendard"/>
                 <a:ea typeface="Pretendard"/>
@@ -16560,7 +16560,7 @@
             <a:r>
               <a:rPr sz="2400" b="1">
                 <a:solidFill>
-                  <a:srgbClr val="1E2A6E"/>
+                  <a:srgbClr val="1E3E69"/>
                 </a:solidFill>
                 <a:latin typeface="Pretendard"/>
                 <a:ea typeface="Pretendard"/>
@@ -16604,7 +16604,7 @@
             <a:avLst/>
           </a:prstGeom>
           <a:solidFill>
-            <a:srgbClr val="F4F6FC"/>
+            <a:srgbClr val="F3F8F6"/>
           </a:solidFill>
           <a:ln>
             <a:noFill/>
@@ -16664,7 +16664,7 @@
             <a:avLst/>
           </a:prstGeom>
           <a:solidFill>
-            <a:srgbClr val="F8F8FA"/>
+            <a:srgbClr val="F8F9FA"/>
           </a:solidFill>
           <a:ln>
             <a:noFill/>
@@ -16709,7 +16709,7 @@
             <a:r>
               <a:rPr sz="1950" b="1" spc="160">
                 <a:solidFill>
-                  <a:srgbClr val="2457D6"/>
+                  <a:srgbClr val="1E7F5B"/>
                 </a:solidFill>
                 <a:latin typeface="Pretendard"/>
                 <a:ea typeface="Pretendard"/>
@@ -16750,7 +16750,7 @@
             <a:r>
               <a:rPr sz="5100" b="1">
                 <a:solidFill>
-                  <a:srgbClr val="1E2A6E"/>
+                  <a:srgbClr val="1E3E69"/>
                 </a:solidFill>
                 <a:latin typeface="Pretendard"/>
                 <a:ea typeface="Pretendard"/>
@@ -16776,7 +16776,7 @@
             <a:avLst/>
           </a:prstGeom>
           <a:solidFill>
-            <a:srgbClr val="1E2A6E"/>
+            <a:srgbClr val="1E3E69"/>
           </a:solidFill>
           <a:ln>
             <a:noFill/>
@@ -16806,7 +16806,7 @@
             <a:avLst/>
           </a:prstGeom>
           <a:solidFill>
-            <a:srgbClr val="C9D7FF"/>
+            <a:srgbClr val="C3E6D8"/>
           </a:solidFill>
           <a:ln>
             <a:noFill/>
@@ -16851,7 +16851,7 @@
             <a:r>
               <a:rPr sz="1950" b="1">
                 <a:solidFill>
-                  <a:srgbClr val="2457D6"/>
+                  <a:srgbClr val="1E7F5B"/>
                 </a:solidFill>
                 <a:latin typeface="Pretendard"/>
                 <a:ea typeface="Pretendard"/>
@@ -16877,7 +16877,7 @@
             <a:avLst/>
           </a:prstGeom>
           <a:solidFill>
-            <a:srgbClr val="2457D6"/>
+            <a:srgbClr val="1E7F5B"/>
           </a:solidFill>
           <a:ln>
             <a:noFill/>
@@ -16909,11 +16909,11 @@
             </a:avLst>
           </a:prstGeom>
           <a:solidFill>
-            <a:srgbClr val="F6F8FD"/>
+            <a:srgbClr val="F4F7FA"/>
           </a:solidFill>
           <a:ln w="9525">
             <a:solidFill>
-              <a:srgbClr val="DEE3F0"/>
+              <a:srgbClr val="D8E1EE"/>
             </a:solidFill>
           </a:ln>
           <a:effectLst/>
@@ -16956,7 +16956,7 @@
             <a:r>
               <a:rPr sz="2250" b="1">
                 <a:solidFill>
-                  <a:srgbClr val="1E2A6E"/>
+                  <a:srgbClr val="1E3E69"/>
                 </a:solidFill>
                 <a:latin typeface="Pretendard"/>
                 <a:ea typeface="Pretendard"/>
@@ -16982,7 +16982,7 @@
             <a:avLst/>
           </a:prstGeom>
           <a:solidFill>
-            <a:srgbClr val="DEE3F0"/>
+            <a:srgbClr val="D8E1EE"/>
           </a:solidFill>
           <a:ln>
             <a:noFill/>
@@ -17027,7 +17027,7 @@
             <a:r>
               <a:rPr sz="1500" b="1" spc="120">
                 <a:solidFill>
-                  <a:srgbClr val="2457D6"/>
+                  <a:srgbClr val="1E7F5B"/>
                 </a:solidFill>
                 <a:latin typeface="Pretendard"/>
                 <a:ea typeface="Pretendard"/>
@@ -17109,7 +17109,7 @@
             <a:r>
               <a:rPr sz="1950" b="1">
                 <a:solidFill>
-                  <a:srgbClr val="2457D6"/>
+                  <a:srgbClr val="1E7F5B"/>
                 </a:solidFill>
                 <a:latin typeface="Pretendard"/>
                 <a:ea typeface="Pretendard"/>
@@ -17135,7 +17135,7 @@
             <a:avLst/>
           </a:prstGeom>
           <a:solidFill>
-            <a:srgbClr val="2457D6"/>
+            <a:srgbClr val="1E7F5B"/>
           </a:solidFill>
           <a:ln>
             <a:noFill/>
@@ -17167,11 +17167,11 @@
             </a:avLst>
           </a:prstGeom>
           <a:solidFill>
-            <a:srgbClr val="F6F8FD"/>
+            <a:srgbClr val="F4F7FA"/>
           </a:solidFill>
           <a:ln w="9525">
             <a:solidFill>
-              <a:srgbClr val="DEE3F0"/>
+              <a:srgbClr val="D8E1EE"/>
             </a:solidFill>
           </a:ln>
           <a:effectLst/>
@@ -17214,7 +17214,7 @@
             <a:r>
               <a:rPr sz="2250" b="1">
                 <a:solidFill>
-                  <a:srgbClr val="1E2A6E"/>
+                  <a:srgbClr val="1E3E69"/>
                 </a:solidFill>
                 <a:latin typeface="Pretendard"/>
                 <a:ea typeface="Pretendard"/>
@@ -17240,7 +17240,7 @@
             <a:avLst/>
           </a:prstGeom>
           <a:solidFill>
-            <a:srgbClr val="DEE3F0"/>
+            <a:srgbClr val="D8E1EE"/>
           </a:solidFill>
           <a:ln>
             <a:noFill/>
@@ -17285,7 +17285,7 @@
             <a:r>
               <a:rPr sz="1500" b="1" spc="120">
                 <a:solidFill>
-                  <a:srgbClr val="2457D6"/>
+                  <a:srgbClr val="1E7F5B"/>
                 </a:solidFill>
                 <a:latin typeface="Pretendard"/>
                 <a:ea typeface="Pretendard"/>
@@ -17367,7 +17367,7 @@
             <a:r>
               <a:rPr sz="1950" b="1">
                 <a:solidFill>
-                  <a:srgbClr val="1E2A6E"/>
+                  <a:srgbClr val="1E3E69"/>
                 </a:solidFill>
                 <a:latin typeface="Pretendard"/>
                 <a:ea typeface="Pretendard"/>
@@ -17393,7 +17393,7 @@
             <a:avLst/>
           </a:prstGeom>
           <a:solidFill>
-            <a:srgbClr val="1E2A6E"/>
+            <a:srgbClr val="1E3E69"/>
           </a:solidFill>
           <a:ln>
             <a:noFill/>
@@ -17425,11 +17425,11 @@
             </a:avLst>
           </a:prstGeom>
           <a:solidFill>
-            <a:srgbClr val="EAF0FF"/>
+            <a:srgbClr val="E6F4EE"/>
           </a:solidFill>
           <a:ln w="19050">
             <a:solidFill>
-              <a:srgbClr val="1E2A6E"/>
+              <a:srgbClr val="1E3E69"/>
             </a:solidFill>
           </a:ln>
           <a:effectLst/>
@@ -17472,7 +17472,7 @@
             <a:r>
               <a:rPr sz="2250" b="1">
                 <a:solidFill>
-                  <a:srgbClr val="1E2A6E"/>
+                  <a:srgbClr val="1E3E69"/>
                 </a:solidFill>
                 <a:latin typeface="Pretendard"/>
                 <a:ea typeface="Pretendard"/>
@@ -17498,7 +17498,7 @@
             <a:avLst/>
           </a:prstGeom>
           <a:solidFill>
-            <a:srgbClr val="DEE3F0"/>
+            <a:srgbClr val="D8E1EE"/>
           </a:solidFill>
           <a:ln>
             <a:noFill/>
@@ -17543,7 +17543,7 @@
             <a:r>
               <a:rPr sz="1500" b="1" spc="120">
                 <a:solidFill>
-                  <a:srgbClr val="2457D6"/>
+                  <a:srgbClr val="1E7F5B"/>
                 </a:solidFill>
                 <a:latin typeface="Pretendard"/>
                 <a:ea typeface="Pretendard"/>
@@ -17625,7 +17625,7 @@
             <a:r>
               <a:rPr sz="1950" b="1">
                 <a:solidFill>
-                  <a:srgbClr val="2457D6"/>
+                  <a:srgbClr val="1E7F5B"/>
                 </a:solidFill>
                 <a:latin typeface="Pretendard"/>
                 <a:ea typeface="Pretendard"/>
@@ -17651,7 +17651,7 @@
             <a:avLst/>
           </a:prstGeom>
           <a:solidFill>
-            <a:srgbClr val="2457D6"/>
+            <a:srgbClr val="1E7F5B"/>
           </a:solidFill>
           <a:ln>
             <a:noFill/>
@@ -17683,11 +17683,11 @@
             </a:avLst>
           </a:prstGeom>
           <a:solidFill>
-            <a:srgbClr val="F6F8FD"/>
+            <a:srgbClr val="F4F7FA"/>
           </a:solidFill>
           <a:ln w="9525">
             <a:solidFill>
-              <a:srgbClr val="DEE3F0"/>
+              <a:srgbClr val="D8E1EE"/>
             </a:solidFill>
           </a:ln>
           <a:effectLst/>
@@ -17730,7 +17730,7 @@
             <a:r>
               <a:rPr sz="2250" b="1">
                 <a:solidFill>
-                  <a:srgbClr val="1E2A6E"/>
+                  <a:srgbClr val="1E3E69"/>
                 </a:solidFill>
                 <a:latin typeface="Pretendard"/>
                 <a:ea typeface="Pretendard"/>
@@ -17756,7 +17756,7 @@
             <a:avLst/>
           </a:prstGeom>
           <a:solidFill>
-            <a:srgbClr val="DEE3F0"/>
+            <a:srgbClr val="D8E1EE"/>
           </a:solidFill>
           <a:ln>
             <a:noFill/>
@@ -17801,7 +17801,7 @@
             <a:r>
               <a:rPr sz="1500" b="1" spc="120">
                 <a:solidFill>
-                  <a:srgbClr val="2457D6"/>
+                  <a:srgbClr val="1E7F5B"/>
                 </a:solidFill>
                 <a:latin typeface="Pretendard"/>
                 <a:ea typeface="Pretendard"/>
@@ -17868,7 +17868,7 @@
             <a:avLst/>
           </a:prstGeom>
           <a:solidFill>
-            <a:srgbClr val="C9D7FF"/>
+            <a:srgbClr val="C3E6D8"/>
           </a:solidFill>
           <a:ln>
             <a:noFill/>
@@ -17939,7 +17939,7 @@
             <a:avLst/>
           </a:prstGeom>
           <a:solidFill>
-            <a:srgbClr val="DEE3F0"/>
+            <a:srgbClr val="D8E1EE"/>
           </a:solidFill>
           <a:ln>
             <a:noFill/>
@@ -18069,7 +18069,7 @@
             <a:avLst/>
           </a:prstGeom>
           <a:solidFill>
-            <a:srgbClr val="F4F6FC"/>
+            <a:srgbClr val="F3F8F6"/>
           </a:solidFill>
           <a:ln>
             <a:noFill/>
@@ -18099,7 +18099,7 @@
             <a:avLst/>
           </a:prstGeom>
           <a:solidFill>
-            <a:srgbClr val="F6F6F9"/>
+            <a:srgbClr val="F6F7F9"/>
           </a:solidFill>
           <a:ln>
             <a:noFill/>
@@ -18129,7 +18129,7 @@
             <a:avLst/>
           </a:prstGeom>
           <a:solidFill>
-            <a:srgbClr val="1E2A6E"/>
+            <a:srgbClr val="1E3E69"/>
           </a:solidFill>
           <a:ln>
             <a:noFill/>
@@ -18174,7 +18174,7 @@
             <a:r>
               <a:rPr sz="2400" b="1">
                 <a:solidFill>
-                  <a:srgbClr val="2457D6"/>
+                  <a:srgbClr val="1E7F5B"/>
                 </a:solidFill>
                 <a:latin typeface="Pretendard"/>
                 <a:ea typeface="Pretendard"/>
@@ -18215,7 +18215,7 @@
             <a:r>
               <a:rPr sz="6600" b="1">
                 <a:solidFill>
-                  <a:srgbClr val="1E2A6E"/>
+                  <a:srgbClr val="1E3E69"/>
                 </a:solidFill>
                 <a:latin typeface="Pretendard"/>
                 <a:ea typeface="Pretendard"/>
@@ -18282,7 +18282,7 @@
             <a:avLst/>
           </a:prstGeom>
           <a:solidFill>
-            <a:srgbClr val="DEE3F0"/>
+            <a:srgbClr val="D8E1EE"/>
           </a:solidFill>
           <a:ln>
             <a:noFill/>
@@ -18412,7 +18412,7 @@
             <a:avLst/>
           </a:prstGeom>
           <a:solidFill>
-            <a:srgbClr val="F4F6FC"/>
+            <a:srgbClr val="F3F8F6"/>
           </a:solidFill>
           <a:ln>
             <a:noFill/>
@@ -18472,7 +18472,7 @@
             <a:avLst/>
           </a:prstGeom>
           <a:solidFill>
-            <a:srgbClr val="F8F8FA"/>
+            <a:srgbClr val="F8F9FA"/>
           </a:solidFill>
           <a:ln>
             <a:noFill/>
@@ -18517,7 +18517,7 @@
             <a:r>
               <a:rPr sz="1950" b="1" spc="160">
                 <a:solidFill>
-                  <a:srgbClr val="2457D6"/>
+                  <a:srgbClr val="1E7F5B"/>
                 </a:solidFill>
                 <a:latin typeface="Pretendard"/>
                 <a:ea typeface="Pretendard"/>
@@ -18558,7 +18558,7 @@
             <a:r>
               <a:rPr sz="5100" b="1">
                 <a:solidFill>
-                  <a:srgbClr val="1E2A6E"/>
+                  <a:srgbClr val="1E3E69"/>
                 </a:solidFill>
                 <a:latin typeface="Pretendard"/>
                 <a:ea typeface="Pretendard"/>
@@ -18584,7 +18584,7 @@
             <a:avLst/>
           </a:prstGeom>
           <a:solidFill>
-            <a:srgbClr val="1E2A6E"/>
+            <a:srgbClr val="1E3E69"/>
           </a:solidFill>
           <a:ln>
             <a:noFill/>
@@ -18629,7 +18629,7 @@
             <a:r>
               <a:rPr sz="3150" b="1">
                 <a:solidFill>
-                  <a:srgbClr val="1E2A6E"/>
+                  <a:srgbClr val="1E3E69"/>
                 </a:solidFill>
                 <a:latin typeface="Pretendard"/>
                 <a:ea typeface="Pretendard"/>
@@ -18698,11 +18698,11 @@
             </a:avLst>
           </a:prstGeom>
           <a:solidFill>
-            <a:srgbClr val="F6F8FD"/>
+            <a:srgbClr val="F4F7FA"/>
           </a:solidFill>
           <a:ln w="9525">
             <a:solidFill>
-              <a:srgbClr val="DEE3F0"/>
+              <a:srgbClr val="D8E1EE"/>
             </a:solidFill>
           </a:ln>
           <a:effectLst/>
@@ -18730,7 +18730,7 @@
             <a:avLst/>
           </a:prstGeom>
           <a:solidFill>
-            <a:srgbClr val="2457D6"/>
+            <a:srgbClr val="1E7F5B"/>
           </a:solidFill>
           <a:ln>
             <a:noFill/>
@@ -18801,7 +18801,7 @@
             <a:avLst/>
           </a:prstGeom>
           <a:solidFill>
-            <a:srgbClr val="2457D6"/>
+            <a:srgbClr val="1E7F5B"/>
           </a:solidFill>
           <a:ln>
             <a:noFill/>
@@ -18872,7 +18872,7 @@
             <a:avLst/>
           </a:prstGeom>
           <a:solidFill>
-            <a:srgbClr val="2457D6"/>
+            <a:srgbClr val="1E7F5B"/>
           </a:solidFill>
           <a:ln>
             <a:noFill/>
@@ -18958,7 +18958,7 @@
             <a:r>
               <a:rPr sz="3150" b="1">
                 <a:solidFill>
-                  <a:srgbClr val="1E2A6E"/>
+                  <a:srgbClr val="1E3E69"/>
                 </a:solidFill>
                 <a:latin typeface="Pretendard"/>
                 <a:ea typeface="Pretendard"/>
@@ -19027,11 +19027,11 @@
             </a:avLst>
           </a:prstGeom>
           <a:solidFill>
-            <a:srgbClr val="F6F8FD"/>
+            <a:srgbClr val="F4F7FA"/>
           </a:solidFill>
           <a:ln w="9525">
             <a:solidFill>
-              <a:srgbClr val="DEE3F0"/>
+              <a:srgbClr val="D8E1EE"/>
             </a:solidFill>
           </a:ln>
           <a:effectLst/>
@@ -19059,7 +19059,7 @@
             <a:avLst/>
           </a:prstGeom>
           <a:solidFill>
-            <a:srgbClr val="2457D6"/>
+            <a:srgbClr val="1E7F5B"/>
           </a:solidFill>
           <a:ln>
             <a:noFill/>
@@ -19130,7 +19130,7 @@
             <a:avLst/>
           </a:prstGeom>
           <a:solidFill>
-            <a:srgbClr val="2457D6"/>
+            <a:srgbClr val="1E7F5B"/>
           </a:solidFill>
           <a:ln>
             <a:noFill/>
@@ -19201,7 +19201,7 @@
             <a:avLst/>
           </a:prstGeom>
           <a:solidFill>
-            <a:srgbClr val="2457D6"/>
+            <a:srgbClr val="1E7F5B"/>
           </a:solidFill>
           <a:ln>
             <a:noFill/>
@@ -19272,7 +19272,7 @@
             <a:avLst/>
           </a:prstGeom>
           <a:solidFill>
-            <a:srgbClr val="1E2A6E"/>
+            <a:srgbClr val="1E3E69"/>
           </a:solidFill>
           <a:ln>
             <a:noFill/>
@@ -19343,7 +19343,7 @@
             <a:avLst/>
           </a:prstGeom>
           <a:solidFill>
-            <a:srgbClr val="DEE3F0"/>
+            <a:srgbClr val="D8E1EE"/>
           </a:solidFill>
           <a:ln>
             <a:noFill/>
@@ -19473,7 +19473,7 @@
             <a:avLst/>
           </a:prstGeom>
           <a:solidFill>
-            <a:srgbClr val="F4F6FC"/>
+            <a:srgbClr val="F3F8F6"/>
           </a:solidFill>
           <a:ln>
             <a:noFill/>
@@ -19533,7 +19533,7 @@
             <a:avLst/>
           </a:prstGeom>
           <a:solidFill>
-            <a:srgbClr val="F8F8FA"/>
+            <a:srgbClr val="F8F9FA"/>
           </a:solidFill>
           <a:ln>
             <a:noFill/>
@@ -19578,7 +19578,7 @@
             <a:r>
               <a:rPr sz="1950" b="1" spc="160">
                 <a:solidFill>
-                  <a:srgbClr val="2457D6"/>
+                  <a:srgbClr val="1E7F5B"/>
                 </a:solidFill>
                 <a:latin typeface="Pretendard"/>
                 <a:ea typeface="Pretendard"/>
@@ -19619,7 +19619,7 @@
             <a:r>
               <a:rPr sz="5100" b="1">
                 <a:solidFill>
-                  <a:srgbClr val="1E2A6E"/>
+                  <a:srgbClr val="1E3E69"/>
                 </a:solidFill>
                 <a:latin typeface="Pretendard"/>
                 <a:ea typeface="Pretendard"/>
@@ -19645,7 +19645,7 @@
             <a:avLst/>
           </a:prstGeom>
           <a:solidFill>
-            <a:srgbClr val="1E2A6E"/>
+            <a:srgbClr val="1E3E69"/>
           </a:solidFill>
           <a:ln>
             <a:noFill/>
@@ -19690,7 +19690,7 @@
             <a:r>
               <a:rPr sz="3150" b="1">
                 <a:solidFill>
-                  <a:srgbClr val="1E2A6E"/>
+                  <a:srgbClr val="1E3E69"/>
                 </a:solidFill>
                 <a:latin typeface="Pretendard"/>
                 <a:ea typeface="Pretendard"/>
@@ -19759,11 +19759,11 @@
             </a:avLst>
           </a:prstGeom>
           <a:solidFill>
-            <a:srgbClr val="F6F8FD"/>
+            <a:srgbClr val="F4F7FA"/>
           </a:solidFill>
           <a:ln w="9525">
             <a:solidFill>
-              <a:srgbClr val="DEE3F0"/>
+              <a:srgbClr val="D8E1EE"/>
             </a:solidFill>
           </a:ln>
           <a:effectLst/>
@@ -19791,7 +19791,7 @@
             <a:avLst/>
           </a:prstGeom>
           <a:solidFill>
-            <a:srgbClr val="2457D6"/>
+            <a:srgbClr val="1E7F5B"/>
           </a:solidFill>
           <a:ln>
             <a:noFill/>
@@ -19862,7 +19862,7 @@
             <a:avLst/>
           </a:prstGeom>
           <a:solidFill>
-            <a:srgbClr val="2457D6"/>
+            <a:srgbClr val="1E7F5B"/>
           </a:solidFill>
           <a:ln>
             <a:noFill/>
@@ -19933,7 +19933,7 @@
             <a:avLst/>
           </a:prstGeom>
           <a:solidFill>
-            <a:srgbClr val="2457D6"/>
+            <a:srgbClr val="1E7F5B"/>
           </a:solidFill>
           <a:ln>
             <a:noFill/>
@@ -20019,7 +20019,7 @@
             <a:r>
               <a:rPr sz="3150" b="1">
                 <a:solidFill>
-                  <a:srgbClr val="1E2A6E"/>
+                  <a:srgbClr val="1E3E69"/>
                 </a:solidFill>
                 <a:latin typeface="Pretendard"/>
                 <a:ea typeface="Pretendard"/>
@@ -20088,11 +20088,11 @@
             </a:avLst>
           </a:prstGeom>
           <a:solidFill>
-            <a:srgbClr val="F6F8FD"/>
+            <a:srgbClr val="F4F7FA"/>
           </a:solidFill>
           <a:ln w="9525">
             <a:solidFill>
-              <a:srgbClr val="DEE3F0"/>
+              <a:srgbClr val="D8E1EE"/>
             </a:solidFill>
           </a:ln>
           <a:effectLst/>
@@ -20120,7 +20120,7 @@
             <a:avLst/>
           </a:prstGeom>
           <a:solidFill>
-            <a:srgbClr val="2457D6"/>
+            <a:srgbClr val="1E7F5B"/>
           </a:solidFill>
           <a:ln>
             <a:noFill/>
@@ -20191,7 +20191,7 @@
             <a:avLst/>
           </a:prstGeom>
           <a:solidFill>
-            <a:srgbClr val="2457D6"/>
+            <a:srgbClr val="1E7F5B"/>
           </a:solidFill>
           <a:ln>
             <a:noFill/>
@@ -20262,7 +20262,7 @@
             <a:avLst/>
           </a:prstGeom>
           <a:solidFill>
-            <a:srgbClr val="2457D6"/>
+            <a:srgbClr val="1E7F5B"/>
           </a:solidFill>
           <a:ln>
             <a:noFill/>
@@ -20333,7 +20333,7 @@
             <a:avLst/>
           </a:prstGeom>
           <a:solidFill>
-            <a:srgbClr val="1E2A6E"/>
+            <a:srgbClr val="1E3E69"/>
           </a:solidFill>
           <a:ln>
             <a:noFill/>
@@ -20404,7 +20404,7 @@
             <a:avLst/>
           </a:prstGeom>
           <a:solidFill>
-            <a:srgbClr val="DEE3F0"/>
+            <a:srgbClr val="D8E1EE"/>
           </a:solidFill>
           <a:ln>
             <a:noFill/>
@@ -20534,7 +20534,7 @@
             <a:avLst/>
           </a:prstGeom>
           <a:solidFill>
-            <a:srgbClr val="F4F6FC"/>
+            <a:srgbClr val="F3F8F6"/>
           </a:solidFill>
           <a:ln>
             <a:noFill/>
@@ -20594,7 +20594,7 @@
             <a:avLst/>
           </a:prstGeom>
           <a:solidFill>
-            <a:srgbClr val="F8F8FA"/>
+            <a:srgbClr val="F8F9FA"/>
           </a:solidFill>
           <a:ln>
             <a:noFill/>
@@ -20639,7 +20639,7 @@
             <a:r>
               <a:rPr sz="1950" b="1" spc="160">
                 <a:solidFill>
-                  <a:srgbClr val="2457D6"/>
+                  <a:srgbClr val="1E7F5B"/>
                 </a:solidFill>
                 <a:latin typeface="Pretendard"/>
                 <a:ea typeface="Pretendard"/>
@@ -20680,7 +20680,7 @@
             <a:r>
               <a:rPr sz="5100" b="1">
                 <a:solidFill>
-                  <a:srgbClr val="1E2A6E"/>
+                  <a:srgbClr val="1E3E69"/>
                 </a:solidFill>
                 <a:latin typeface="Pretendard"/>
                 <a:ea typeface="Pretendard"/>
@@ -20706,7 +20706,7 @@
             <a:avLst/>
           </a:prstGeom>
           <a:solidFill>
-            <a:srgbClr val="1E2A6E"/>
+            <a:srgbClr val="1E3E69"/>
           </a:solidFill>
           <a:ln>
             <a:noFill/>
@@ -20779,11 +20779,11 @@
             </a:avLst>
           </a:prstGeom>
           <a:solidFill>
-            <a:srgbClr val="F6F8FD"/>
+            <a:srgbClr val="F4F7FA"/>
           </a:solidFill>
           <a:ln w="9525">
             <a:solidFill>
-              <a:srgbClr val="DEE3F0"/>
+              <a:srgbClr val="D8E1EE"/>
             </a:solidFill>
           </a:ln>
           <a:effectLst/>
@@ -20811,7 +20811,7 @@
             <a:avLst/>
           </a:prstGeom>
           <a:solidFill>
-            <a:srgbClr val="1E2A6E"/>
+            <a:srgbClr val="1E3E69"/>
           </a:solidFill>
           <a:ln>
             <a:noFill/>
@@ -20943,11 +20943,11 @@
             </a:avLst>
           </a:prstGeom>
           <a:solidFill>
-            <a:srgbClr val="F6F8FD"/>
+            <a:srgbClr val="F4F7FA"/>
           </a:solidFill>
           <a:ln w="9525">
             <a:solidFill>
-              <a:srgbClr val="DEE3F0"/>
+              <a:srgbClr val="D8E1EE"/>
             </a:solidFill>
           </a:ln>
           <a:effectLst/>
@@ -20975,7 +20975,7 @@
             <a:avLst/>
           </a:prstGeom>
           <a:solidFill>
-            <a:srgbClr val="2457D6"/>
+            <a:srgbClr val="1E7F5B"/>
           </a:solidFill>
           <a:ln>
             <a:noFill/>
@@ -21107,11 +21107,11 @@
             </a:avLst>
           </a:prstGeom>
           <a:solidFill>
-            <a:srgbClr val="F6F8FD"/>
+            <a:srgbClr val="F4F7FA"/>
           </a:solidFill>
           <a:ln w="9525">
             <a:solidFill>
-              <a:srgbClr val="DEE3F0"/>
+              <a:srgbClr val="D8E1EE"/>
             </a:solidFill>
           </a:ln>
           <a:effectLst/>
@@ -21139,7 +21139,7 @@
             <a:avLst/>
           </a:prstGeom>
           <a:solidFill>
-            <a:srgbClr val="1E2A6E"/>
+            <a:srgbClr val="1E3E69"/>
           </a:solidFill>
           <a:ln>
             <a:noFill/>
@@ -21271,11 +21271,11 @@
             </a:avLst>
           </a:prstGeom>
           <a:solidFill>
-            <a:srgbClr val="F6F8FD"/>
+            <a:srgbClr val="F4F7FA"/>
           </a:solidFill>
           <a:ln w="9525">
             <a:solidFill>
-              <a:srgbClr val="DEE3F0"/>
+              <a:srgbClr val="D8E1EE"/>
             </a:solidFill>
           </a:ln>
           <a:effectLst/>
@@ -21303,7 +21303,7 @@
             <a:avLst/>
           </a:prstGeom>
           <a:solidFill>
-            <a:srgbClr val="2457D6"/>
+            <a:srgbClr val="1E7F5B"/>
           </a:solidFill>
           <a:ln>
             <a:noFill/>
@@ -21433,7 +21433,7 @@
             <a:avLst/>
           </a:prstGeom>
           <a:solidFill>
-            <a:srgbClr val="DEE3F0"/>
+            <a:srgbClr val="D8E1EE"/>
           </a:solidFill>
           <a:ln>
             <a:noFill/>
@@ -21563,7 +21563,7 @@
             <a:avLst/>
           </a:prstGeom>
           <a:solidFill>
-            <a:srgbClr val="F4F6FC"/>
+            <a:srgbClr val="F3F8F6"/>
           </a:solidFill>
           <a:ln>
             <a:noFill/>
@@ -21623,7 +21623,7 @@
             <a:avLst/>
           </a:prstGeom>
           <a:solidFill>
-            <a:srgbClr val="F8F8FA"/>
+            <a:srgbClr val="F8F9FA"/>
           </a:solidFill>
           <a:ln>
             <a:noFill/>
@@ -21655,7 +21655,7 @@
             </a:avLst>
           </a:prstGeom>
           <a:solidFill>
-            <a:srgbClr val="2457D6"/>
+            <a:srgbClr val="1E7F5B"/>
           </a:solidFill>
           <a:ln>
             <a:noFill/>
@@ -21771,7 +21771,7 @@
             <a:r>
               <a:rPr sz="1950" b="1" spc="160">
                 <a:solidFill>
-                  <a:srgbClr val="2457D6"/>
+                  <a:srgbClr val="1E7F5B"/>
                 </a:solidFill>
                 <a:latin typeface="Pretendard"/>
                 <a:ea typeface="Pretendard"/>
@@ -21812,7 +21812,7 @@
             <a:r>
               <a:rPr sz="5100" b="1">
                 <a:solidFill>
-                  <a:srgbClr val="1E2A6E"/>
+                  <a:srgbClr val="1E3E69"/>
                 </a:solidFill>
                 <a:latin typeface="Pretendard"/>
                 <a:ea typeface="Pretendard"/>
@@ -21838,7 +21838,7 @@
             <a:avLst/>
           </a:prstGeom>
           <a:solidFill>
-            <a:srgbClr val="1E2A6E"/>
+            <a:srgbClr val="1E3E69"/>
           </a:solidFill>
           <a:ln>
             <a:noFill/>
@@ -21883,7 +21883,7 @@
             <a:r>
               <a:rPr sz="2250" b="1">
                 <a:solidFill>
-                  <a:srgbClr val="2457D6"/>
+                  <a:srgbClr val="1E7F5B"/>
                 </a:solidFill>
                 <a:latin typeface="Pretendard"/>
                 <a:ea typeface="Pretendard"/>
@@ -21911,11 +21911,11 @@
             </a:avLst>
           </a:prstGeom>
           <a:solidFill>
-            <a:srgbClr val="F6F8FD"/>
+            <a:srgbClr val="F4F7FA"/>
           </a:solidFill>
           <a:ln w="9525">
             <a:solidFill>
-              <a:srgbClr val="DEE3F0"/>
+              <a:srgbClr val="D8E1EE"/>
             </a:solidFill>
           </a:ln>
           <a:effectLst/>
@@ -21943,7 +21943,7 @@
             <a:avLst/>
           </a:prstGeom>
           <a:solidFill>
-            <a:srgbClr val="1E2A6E"/>
+            <a:srgbClr val="1E3E69"/>
           </a:solidFill>
           <a:ln>
             <a:noFill/>
@@ -22029,7 +22029,7 @@
             <a:r>
               <a:rPr sz="2700" b="1">
                 <a:solidFill>
-                  <a:srgbClr val="1E2A6E"/>
+                  <a:srgbClr val="1E3E69"/>
                 </a:solidFill>
                 <a:latin typeface="Pretendard"/>
                 <a:ea typeface="Pretendard"/>
@@ -22055,7 +22055,7 @@
             <a:avLst/>
           </a:prstGeom>
           <a:solidFill>
-            <a:srgbClr val="2457D6"/>
+            <a:srgbClr val="1E7F5B"/>
           </a:solidFill>
           <a:ln>
             <a:noFill/>
@@ -22100,7 +22100,7 @@
             <a:r>
               <a:rPr sz="1875" b="1" spc="150">
                 <a:solidFill>
-                  <a:srgbClr val="2457D6"/>
+                  <a:srgbClr val="1E7F5B"/>
                 </a:solidFill>
                 <a:latin typeface="Pretendard"/>
                 <a:ea typeface="Pretendard"/>
@@ -22141,7 +22141,7 @@
             <a:r>
               <a:rPr sz="2475" b="1">
                 <a:solidFill>
-                  <a:srgbClr val="1E2A6E"/>
+                  <a:srgbClr val="1E3E69"/>
                 </a:solidFill>
                 <a:latin typeface="Pretendard"/>
                 <a:ea typeface="Pretendard"/>
@@ -22167,7 +22167,7 @@
             <a:avLst/>
           </a:prstGeom>
           <a:solidFill>
-            <a:srgbClr val="DEE3F0"/>
+            <a:srgbClr val="D8E1EE"/>
           </a:solidFill>
           <a:ln>
             <a:noFill/>
@@ -22297,7 +22297,7 @@
             <a:avLst/>
           </a:prstGeom>
           <a:solidFill>
-            <a:srgbClr val="F4F6FC"/>
+            <a:srgbClr val="F3F8F6"/>
           </a:solidFill>
           <a:ln>
             <a:noFill/>
@@ -22357,7 +22357,7 @@
             <a:avLst/>
           </a:prstGeom>
           <a:solidFill>
-            <a:srgbClr val="F8F8FA"/>
+            <a:srgbClr val="F8F9FA"/>
           </a:solidFill>
           <a:ln>
             <a:noFill/>
@@ -22402,7 +22402,7 @@
             <a:r>
               <a:rPr sz="1950" b="1" spc="160">
                 <a:solidFill>
-                  <a:srgbClr val="2457D6"/>
+                  <a:srgbClr val="1E7F5B"/>
                 </a:solidFill>
                 <a:latin typeface="Pretendard"/>
                 <a:ea typeface="Pretendard"/>
@@ -22443,7 +22443,7 @@
             <a:r>
               <a:rPr sz="5100" b="1">
                 <a:solidFill>
-                  <a:srgbClr val="1E2A6E"/>
+                  <a:srgbClr val="1E3E69"/>
                 </a:solidFill>
                 <a:latin typeface="Pretendard"/>
                 <a:ea typeface="Pretendard"/>
@@ -22469,7 +22469,7 @@
             <a:avLst/>
           </a:prstGeom>
           <a:solidFill>
-            <a:srgbClr val="1E2A6E"/>
+            <a:srgbClr val="1E3E69"/>
           </a:solidFill>
           <a:ln>
             <a:noFill/>
@@ -22501,11 +22501,11 @@
             </a:avLst>
           </a:prstGeom>
           <a:solidFill>
-            <a:srgbClr val="F6F8FD"/>
+            <a:srgbClr val="F4F7FA"/>
           </a:solidFill>
           <a:ln w="9525">
             <a:solidFill>
-              <a:srgbClr val="DEE3F0"/>
+              <a:srgbClr val="D8E1EE"/>
             </a:solidFill>
           </a:ln>
           <a:effectLst/>
@@ -22533,7 +22533,7 @@
             <a:avLst/>
           </a:prstGeom>
           <a:solidFill>
-            <a:srgbClr val="2457D6"/>
+            <a:srgbClr val="1E7F5B"/>
           </a:solidFill>
           <a:ln>
             <a:noFill/>
@@ -22619,7 +22619,7 @@
             <a:r>
               <a:rPr sz="3150" b="1">
                 <a:solidFill>
-                  <a:srgbClr val="1E2A6E"/>
+                  <a:srgbClr val="1E3E69"/>
                 </a:solidFill>
                 <a:latin typeface="Pretendard"/>
                 <a:ea typeface="Pretendard"/>
@@ -22690,7 +22690,7 @@
           </a:solidFill>
           <a:ln w="9525">
             <a:solidFill>
-              <a:srgbClr val="DEE3F0"/>
+              <a:srgbClr val="D8E1EE"/>
             </a:solidFill>
           </a:ln>
           <a:effectLst/>
@@ -22733,7 +22733,7 @@
             <a:r>
               <a:rPr sz="1425" b="1">
                 <a:solidFill>
-                  <a:srgbClr val="2457D6"/>
+                  <a:srgbClr val="1E7F5B"/>
                 </a:solidFill>
                 <a:latin typeface="Pretendard"/>
                 <a:ea typeface="Pretendard"/>
@@ -22782,11 +22782,11 @@
             </a:avLst>
           </a:prstGeom>
           <a:solidFill>
-            <a:srgbClr val="F6F8FD"/>
+            <a:srgbClr val="F4F7FA"/>
           </a:solidFill>
           <a:ln w="9525">
             <a:solidFill>
-              <a:srgbClr val="DEE3F0"/>
+              <a:srgbClr val="D8E1EE"/>
             </a:solidFill>
           </a:ln>
           <a:effectLst/>
@@ -22814,7 +22814,7 @@
             <a:avLst/>
           </a:prstGeom>
           <a:solidFill>
-            <a:srgbClr val="2457D6"/>
+            <a:srgbClr val="1E7F5B"/>
           </a:solidFill>
           <a:ln>
             <a:noFill/>
@@ -22900,7 +22900,7 @@
             <a:r>
               <a:rPr sz="3150" b="1">
                 <a:solidFill>
-                  <a:srgbClr val="1E2A6E"/>
+                  <a:srgbClr val="1E3E69"/>
                 </a:solidFill>
                 <a:latin typeface="Pretendard"/>
                 <a:ea typeface="Pretendard"/>
@@ -22971,7 +22971,7 @@
           </a:solidFill>
           <a:ln w="9525">
             <a:solidFill>
-              <a:srgbClr val="DEE3F0"/>
+              <a:srgbClr val="D8E1EE"/>
             </a:solidFill>
           </a:ln>
           <a:effectLst/>
@@ -23014,7 +23014,7 @@
             <a:r>
               <a:rPr sz="1425" b="1">
                 <a:solidFill>
-                  <a:srgbClr val="2457D6"/>
+                  <a:srgbClr val="1E7F5B"/>
                 </a:solidFill>
                 <a:latin typeface="Pretendard"/>
                 <a:ea typeface="Pretendard"/>
@@ -23063,11 +23063,11 @@
             </a:avLst>
           </a:prstGeom>
           <a:solidFill>
-            <a:srgbClr val="F6F8FD"/>
+            <a:srgbClr val="F4F7FA"/>
           </a:solidFill>
           <a:ln w="9525">
             <a:solidFill>
-              <a:srgbClr val="DEE3F0"/>
+              <a:srgbClr val="D8E1EE"/>
             </a:solidFill>
           </a:ln>
           <a:effectLst/>
@@ -23095,7 +23095,7 @@
             <a:avLst/>
           </a:prstGeom>
           <a:solidFill>
-            <a:srgbClr val="2457D6"/>
+            <a:srgbClr val="1E7F5B"/>
           </a:solidFill>
           <a:ln>
             <a:noFill/>
@@ -23181,7 +23181,7 @@
             <a:r>
               <a:rPr sz="3150" b="1">
                 <a:solidFill>
-                  <a:srgbClr val="1E2A6E"/>
+                  <a:srgbClr val="1E3E69"/>
                 </a:solidFill>
                 <a:latin typeface="Pretendard"/>
                 <a:ea typeface="Pretendard"/>
@@ -23252,7 +23252,7 @@
           </a:solidFill>
           <a:ln w="9525">
             <a:solidFill>
-              <a:srgbClr val="DEE3F0"/>
+              <a:srgbClr val="D8E1EE"/>
             </a:solidFill>
           </a:ln>
           <a:effectLst/>
@@ -23295,7 +23295,7 @@
             <a:r>
               <a:rPr sz="1425" b="1">
                 <a:solidFill>
-                  <a:srgbClr val="2457D6"/>
+                  <a:srgbClr val="1E7F5B"/>
                 </a:solidFill>
                 <a:latin typeface="Pretendard"/>
                 <a:ea typeface="Pretendard"/>
@@ -23342,7 +23342,7 @@
             <a:avLst/>
           </a:prstGeom>
           <a:solidFill>
-            <a:srgbClr val="DEE3F0"/>
+            <a:srgbClr val="D8E1EE"/>
           </a:solidFill>
           <a:ln>
             <a:noFill/>
